--- a/public/lessons/year-6-maths/spring/week-19/share-in-a-ratio/teaching-powerpoint-v1.pptx
+++ b/public/lessons/year-6-maths/spring/week-19/share-in-a-ratio/teaching-powerpoint-v1.pptx
@@ -2,24 +2,24 @@
 <file path=ppt/presentation.xml><?xml version="1.0" encoding="utf-8"?>
 <p:presentation xmlns:p="http://schemas.openxmlformats.org/presentationml/2006/main">
   <p:sldMasterIdLst>
-    <p:sldMasterId xmlns:r="http://schemas.openxmlformats.org/officeDocument/2006/relationships" id="2147483648" r:id="R22427a7371bd47dd"/>
+    <p:sldMasterId xmlns:r="http://schemas.openxmlformats.org/officeDocument/2006/relationships" id="2147483648" r:id="R0185782a50e84119"/>
   </p:sldMasterIdLst>
   <p:notesMasterIdLst>
-    <p:notesMasterId xmlns:r="http://schemas.openxmlformats.org/officeDocument/2006/relationships" r:id="Rb79671e245e145bf"/>
+    <p:notesMasterId xmlns:r="http://schemas.openxmlformats.org/officeDocument/2006/relationships" r:id="R7d686fe53d1d4902"/>
   </p:notesMasterIdLst>
   <p:sldIdLst>
-    <p:sldId xmlns:r="http://schemas.openxmlformats.org/officeDocument/2006/relationships" id="256" r:id="R5f3c0a79ce364a55"/>
-    <p:sldId xmlns:r="http://schemas.openxmlformats.org/officeDocument/2006/relationships" id="257" r:id="Rd42678630a8f48ac"/>
-    <p:sldId xmlns:r="http://schemas.openxmlformats.org/officeDocument/2006/relationships" id="258" r:id="Rcaf62451c35f48e3"/>
-    <p:sldId xmlns:r="http://schemas.openxmlformats.org/officeDocument/2006/relationships" id="259" r:id="R6822c289f09c4131"/>
-    <p:sldId xmlns:r="http://schemas.openxmlformats.org/officeDocument/2006/relationships" id="260" r:id="Ra9c30c81e4df4d58"/>
-    <p:sldId xmlns:r="http://schemas.openxmlformats.org/officeDocument/2006/relationships" id="261" r:id="R12ab9be1026c45ec"/>
-    <p:sldId xmlns:r="http://schemas.openxmlformats.org/officeDocument/2006/relationships" id="262" r:id="Ra1128776d4044abe"/>
-    <p:sldId xmlns:r="http://schemas.openxmlformats.org/officeDocument/2006/relationships" id="263" r:id="R9d6430d13a484aac"/>
-    <p:sldId xmlns:r="http://schemas.openxmlformats.org/officeDocument/2006/relationships" id="264" r:id="R650565ecbca94758"/>
-    <p:sldId xmlns:r="http://schemas.openxmlformats.org/officeDocument/2006/relationships" id="265" r:id="R4c8ea03570824442"/>
-    <p:sldId xmlns:r="http://schemas.openxmlformats.org/officeDocument/2006/relationships" id="266" r:id="R06e3d14140fd4eb2"/>
-    <p:sldId xmlns:r="http://schemas.openxmlformats.org/officeDocument/2006/relationships" id="267" r:id="R8edc994076d64042"/>
+    <p:sldId xmlns:r="http://schemas.openxmlformats.org/officeDocument/2006/relationships" id="256" r:id="Rae6faf4bf94c495e"/>
+    <p:sldId xmlns:r="http://schemas.openxmlformats.org/officeDocument/2006/relationships" id="257" r:id="R35aafb7c69204397"/>
+    <p:sldId xmlns:r="http://schemas.openxmlformats.org/officeDocument/2006/relationships" id="258" r:id="R584fdae15a584dee"/>
+    <p:sldId xmlns:r="http://schemas.openxmlformats.org/officeDocument/2006/relationships" id="259" r:id="R38495fe8d98c4738"/>
+    <p:sldId xmlns:r="http://schemas.openxmlformats.org/officeDocument/2006/relationships" id="260" r:id="R0974f1249f1946f0"/>
+    <p:sldId xmlns:r="http://schemas.openxmlformats.org/officeDocument/2006/relationships" id="261" r:id="Rb2f8d1fe32ad4127"/>
+    <p:sldId xmlns:r="http://schemas.openxmlformats.org/officeDocument/2006/relationships" id="262" r:id="Rc1a159df880048c6"/>
+    <p:sldId xmlns:r="http://schemas.openxmlformats.org/officeDocument/2006/relationships" id="263" r:id="R81df51174be94b76"/>
+    <p:sldId xmlns:r="http://schemas.openxmlformats.org/officeDocument/2006/relationships" id="264" r:id="Rd0fa8e16b6d940e5"/>
+    <p:sldId xmlns:r="http://schemas.openxmlformats.org/officeDocument/2006/relationships" id="265" r:id="Ra0a509a4b2f44f8e"/>
+    <p:sldId xmlns:r="http://schemas.openxmlformats.org/officeDocument/2006/relationships" id="266" r:id="R0c08d72a890e4772"/>
+    <p:sldId xmlns:r="http://schemas.openxmlformats.org/officeDocument/2006/relationships" id="267" r:id="R0b53ab4ee73843f0"/>
   </p:sldIdLst>
   <p:sldSz cx="12192000" cy="6858000"/>
   <p:notesSz cx="6858000" cy="9144000"/>
@@ -873,7 +873,7 @@
           <a:lstStyle xmlns:a="http://schemas.openxmlformats.org/drawingml/2006/main"/>
           <a:p xmlns:a="http://schemas.openxmlformats.org/drawingml/2006/main">
             <a:r>
-              <a:t>I do. Reveal the question, setup and each calculation stage one click at a time. Pupils watch before copying. Model answer: £180 and £240.</a:t>
+              <a:t>I do. Reveal the question, then reveal each mathematical change one click at a time. Point to the numbers and operation that changed before moving to the next line. Final answer: £180 and £240.</a:t>
             </a:r>
           </a:p>
         </p:txBody>
@@ -1291,7 +1291,7 @@
   </p:cSld>
   <p:clrMap bg1="lt1" tx1="dk1" bg2="lt2" tx2="dk2" accent1="accent1" accent2="accent2" accent3="accent3" accent4="accent4" accent5="accent5" accent6="accent6" hlink="hlink" folHlink="folHlink"/>
   <p:sldLayoutIdLst>
-    <p:sldLayoutId xmlns:r="http://schemas.openxmlformats.org/officeDocument/2006/relationships" id="2147483649" r:id="R39fd6861f1534892"/>
+    <p:sldLayoutId xmlns:r="http://schemas.openxmlformats.org/officeDocument/2006/relationships" id="2147483649" r:id="R9cd0e114af8041dd"/>
   </p:sldLayoutIdLst>
   <p:txStyles>
     <p:titleStyle>
@@ -1842,7 +1842,7 @@
           <p:cNvPr id="12" name="">
             <a:extLst xmlns:a="http://schemas.openxmlformats.org/drawingml/2006/main">
               <a:ext uri="{FF2B5EF4-FFF2-40B4-BE49-F238E27FC236}">
-                <a16:creationId xmlns:a16="http://schemas.microsoft.com/office/drawing/2014/main" id="{0989128C-860A-4B3A-BD60-333626A80C01}"/>
+                <a16:creationId xmlns:a16="http://schemas.microsoft.com/office/drawing/2014/main" id="{7655BE4F-6CAC-4E1B-B3B2-EC5BAC5965E9}"/>
               </a:ext>
             </a:extLst>
           </p:cNvPr>
@@ -1874,7 +1874,7 @@
           <p:cNvPr id="2" name="">
             <a:extLst xmlns:a="http://schemas.openxmlformats.org/drawingml/2006/main">
               <a:ext uri="{FF2B5EF4-FFF2-40B4-BE49-F238E27FC236}">
-                <a16:creationId xmlns:a16="http://schemas.microsoft.com/office/drawing/2014/main" id="{2AAC52F9-B9FC-49C2-9AEB-46537FCB9115}"/>
+                <a16:creationId xmlns:a16="http://schemas.microsoft.com/office/drawing/2014/main" id="{558E67B1-DB58-43FE-ABFD-82DCFFF2080A}"/>
               </a:ext>
             </a:extLst>
           </p:cNvPr>
@@ -1931,7 +1931,7 @@
           <p:cNvPr id="3" name="">
             <a:extLst xmlns:a="http://schemas.openxmlformats.org/drawingml/2006/main">
               <a:ext uri="{FF2B5EF4-FFF2-40B4-BE49-F238E27FC236}">
-                <a16:creationId xmlns:a16="http://schemas.microsoft.com/office/drawing/2014/main" id="{DFA13AD8-696E-406A-8965-D52B3796F7C3}"/>
+                <a16:creationId xmlns:a16="http://schemas.microsoft.com/office/drawing/2014/main" id="{856EC906-239A-4DFB-BA93-1E22EF2121AA}"/>
               </a:ext>
             </a:extLst>
           </p:cNvPr>
@@ -1965,7 +1965,7 @@
           <p:cNvPr id="4" name="">
             <a:extLst xmlns:a="http://schemas.openxmlformats.org/drawingml/2006/main">
               <a:ext uri="{FF2B5EF4-FFF2-40B4-BE49-F238E27FC236}">
-                <a16:creationId xmlns:a16="http://schemas.microsoft.com/office/drawing/2014/main" id="{EF6E1488-FF12-49E7-AC37-E31D399273B9}"/>
+                <a16:creationId xmlns:a16="http://schemas.microsoft.com/office/drawing/2014/main" id="{FB33F515-1C7B-42BE-8C2D-7501CCB815FC}"/>
               </a:ext>
             </a:extLst>
           </p:cNvPr>
@@ -2022,7 +2022,7 @@
           <p:cNvPr id="5" name="">
             <a:extLst xmlns:a="http://schemas.openxmlformats.org/drawingml/2006/main">
               <a:ext uri="{FF2B5EF4-FFF2-40B4-BE49-F238E27FC236}">
-                <a16:creationId xmlns:a16="http://schemas.microsoft.com/office/drawing/2014/main" id="{410050E9-3AE0-48A1-B22A-D1A2BFC80AB2}"/>
+                <a16:creationId xmlns:a16="http://schemas.microsoft.com/office/drawing/2014/main" id="{9F0E5CBB-D9F9-4FF4-B456-012C43FA32F7}"/>
               </a:ext>
             </a:extLst>
           </p:cNvPr>
@@ -2079,7 +2079,7 @@
           <p:cNvPr id="6" name="">
             <a:extLst xmlns:a="http://schemas.openxmlformats.org/drawingml/2006/main">
               <a:ext uri="{FF2B5EF4-FFF2-40B4-BE49-F238E27FC236}">
-                <a16:creationId xmlns:a16="http://schemas.microsoft.com/office/drawing/2014/main" id="{5A779CB4-63AC-404E-BE51-D137BB698711}"/>
+                <a16:creationId xmlns:a16="http://schemas.microsoft.com/office/drawing/2014/main" id="{30AAFE7E-29F1-4BC4-AF59-C57BF94B9CE5}"/>
               </a:ext>
             </a:extLst>
           </p:cNvPr>
@@ -2113,7 +2113,7 @@
           <p:cNvPr id="7" name="">
             <a:extLst xmlns:a="http://schemas.openxmlformats.org/drawingml/2006/main">
               <a:ext uri="{FF2B5EF4-FFF2-40B4-BE49-F238E27FC236}">
-                <a16:creationId xmlns:a16="http://schemas.microsoft.com/office/drawing/2014/main" id="{A714A983-858B-4A87-97BB-3CC09E020D1F}"/>
+                <a16:creationId xmlns:a16="http://schemas.microsoft.com/office/drawing/2014/main" id="{E6DAAF84-8DDA-49DF-B6A5-253FCFF9F9AE}"/>
               </a:ext>
             </a:extLst>
           </p:cNvPr>
@@ -2170,7 +2170,7 @@
           <p:cNvPr id="8" name="">
             <a:extLst xmlns:a="http://schemas.openxmlformats.org/drawingml/2006/main">
               <a:ext uri="{FF2B5EF4-FFF2-40B4-BE49-F238E27FC236}">
-                <a16:creationId xmlns:a16="http://schemas.microsoft.com/office/drawing/2014/main" id="{68F8D3C8-38E1-4B15-9979-0410A6E322A8}"/>
+                <a16:creationId xmlns:a16="http://schemas.microsoft.com/office/drawing/2014/main" id="{8D23D5A2-2F38-4450-B470-D86F59B8E668}"/>
               </a:ext>
             </a:extLst>
           </p:cNvPr>
@@ -2227,7 +2227,7 @@
           <p:cNvPr id="9" name="">
             <a:extLst xmlns:a="http://schemas.openxmlformats.org/drawingml/2006/main">
               <a:ext uri="{FF2B5EF4-FFF2-40B4-BE49-F238E27FC236}">
-                <a16:creationId xmlns:a16="http://schemas.microsoft.com/office/drawing/2014/main" id="{B492F62A-281F-4E57-8C6D-01123623032D}"/>
+                <a16:creationId xmlns:a16="http://schemas.microsoft.com/office/drawing/2014/main" id="{F7EE4867-1F58-45D2-823F-95C8E0B11D62}"/>
               </a:ext>
             </a:extLst>
           </p:cNvPr>
@@ -2284,7 +2284,7 @@
           <p:cNvPr id="10" name="">
             <a:extLst xmlns:a="http://schemas.openxmlformats.org/drawingml/2006/main">
               <a:ext uri="{FF2B5EF4-FFF2-40B4-BE49-F238E27FC236}">
-                <a16:creationId xmlns:a16="http://schemas.microsoft.com/office/drawing/2014/main" id="{9B423B2D-024A-4EA0-8A41-50C2B9B2E9A0}"/>
+                <a16:creationId xmlns:a16="http://schemas.microsoft.com/office/drawing/2014/main" id="{CE3CF497-29C9-45C6-8464-B599C6D74A94}"/>
               </a:ext>
             </a:extLst>
           </p:cNvPr>
@@ -2341,7 +2341,7 @@
           <p:cNvPr id="11" name="">
             <a:extLst xmlns:a="http://schemas.openxmlformats.org/drawingml/2006/main">
               <a:ext uri="{FF2B5EF4-FFF2-40B4-BE49-F238E27FC236}">
-                <a16:creationId xmlns:a16="http://schemas.microsoft.com/office/drawing/2014/main" id="{3FE9F2DD-F1B6-4E24-95F4-1CA00B55786B}"/>
+                <a16:creationId xmlns:a16="http://schemas.microsoft.com/office/drawing/2014/main" id="{BA700985-6903-4475-80AF-AB62444A14A4}"/>
               </a:ext>
             </a:extLst>
           </p:cNvPr>
@@ -2396,7 +2396,7 @@
     </p:spTree>
     <p:extLst>
       <p:ext uri="{BB962C8B-B14F-4D97-AF65-F5344CB8AC3E}">
-        <p14:creationId xmlns:p14="http://schemas.microsoft.com/office/powerpoint/2010/main" val="1649292116"/>
+        <p14:creationId xmlns:p14="http://schemas.microsoft.com/office/powerpoint/2010/main" val="558212932"/>
       </p:ext>
     </p:extLst>
   </p:cSld>
@@ -2427,7 +2427,7 @@
           <p:cNvPr id="14" name="">
             <a:extLst xmlns:a="http://schemas.openxmlformats.org/drawingml/2006/main">
               <a:ext uri="{FF2B5EF4-FFF2-40B4-BE49-F238E27FC236}">
-                <a16:creationId xmlns:a16="http://schemas.microsoft.com/office/drawing/2014/main" id="{22B9658E-2C11-43A6-8203-28738157AC2C}"/>
+                <a16:creationId xmlns:a16="http://schemas.microsoft.com/office/drawing/2014/main" id="{7F66FDF4-14F3-487A-807A-D48FAA8027AE}"/>
               </a:ext>
             </a:extLst>
           </p:cNvPr>
@@ -2459,7 +2459,7 @@
           <p:cNvPr id="2" name="">
             <a:extLst xmlns:a="http://schemas.openxmlformats.org/drawingml/2006/main">
               <a:ext uri="{FF2B5EF4-FFF2-40B4-BE49-F238E27FC236}">
-                <a16:creationId xmlns:a16="http://schemas.microsoft.com/office/drawing/2014/main" id="{E1C14BA5-56FB-478C-B6E2-21360EB87462}"/>
+                <a16:creationId xmlns:a16="http://schemas.microsoft.com/office/drawing/2014/main" id="{1F6D0075-D6B3-46D3-9A24-C6D4E493536B}"/>
               </a:ext>
             </a:extLst>
           </p:cNvPr>
@@ -2516,7 +2516,7 @@
           <p:cNvPr id="3" name="">
             <a:extLst xmlns:a="http://schemas.openxmlformats.org/drawingml/2006/main">
               <a:ext uri="{FF2B5EF4-FFF2-40B4-BE49-F238E27FC236}">
-                <a16:creationId xmlns:a16="http://schemas.microsoft.com/office/drawing/2014/main" id="{1A9BB888-139E-4E16-932D-8A95537D9261}"/>
+                <a16:creationId xmlns:a16="http://schemas.microsoft.com/office/drawing/2014/main" id="{EB8015ED-3F26-4CB3-8BC1-DB974FFA8658}"/>
               </a:ext>
             </a:extLst>
           </p:cNvPr>
@@ -2548,7 +2548,7 @@
           <p:cNvPr id="4" name="">
             <a:extLst xmlns:a="http://schemas.openxmlformats.org/drawingml/2006/main">
               <a:ext uri="{FF2B5EF4-FFF2-40B4-BE49-F238E27FC236}">
-                <a16:creationId xmlns:a16="http://schemas.microsoft.com/office/drawing/2014/main" id="{0563FF36-830F-4134-99AC-2FD3E51CBC45}"/>
+                <a16:creationId xmlns:a16="http://schemas.microsoft.com/office/drawing/2014/main" id="{36E68BD2-B5E2-4035-AC6B-F3AED335C821}"/>
               </a:ext>
             </a:extLst>
           </p:cNvPr>
@@ -2605,7 +2605,7 @@
           <p:cNvPr id="5" name="">
             <a:extLst xmlns:a="http://schemas.openxmlformats.org/drawingml/2006/main">
               <a:ext uri="{FF2B5EF4-FFF2-40B4-BE49-F238E27FC236}">
-                <a16:creationId xmlns:a16="http://schemas.microsoft.com/office/drawing/2014/main" id="{7004B607-D1C0-444D-88A5-DB81357912BA}"/>
+                <a16:creationId xmlns:a16="http://schemas.microsoft.com/office/drawing/2014/main" id="{4E6B1D5B-FEEE-43F7-B371-E21F72431765}"/>
               </a:ext>
             </a:extLst>
           </p:cNvPr>
@@ -2662,7 +2662,7 @@
           <p:cNvPr id="6" name="">
             <a:extLst xmlns:a="http://schemas.openxmlformats.org/drawingml/2006/main">
               <a:ext uri="{FF2B5EF4-FFF2-40B4-BE49-F238E27FC236}">
-                <a16:creationId xmlns:a16="http://schemas.microsoft.com/office/drawing/2014/main" id="{53874818-CADA-495F-9FE6-827A7F6164CB}"/>
+                <a16:creationId xmlns:a16="http://schemas.microsoft.com/office/drawing/2014/main" id="{334334EB-25FD-43C3-9F73-CEC27C410A15}"/>
               </a:ext>
             </a:extLst>
           </p:cNvPr>
@@ -2719,7 +2719,7 @@
           <p:cNvPr id="7" name="">
             <a:extLst xmlns:a="http://schemas.openxmlformats.org/drawingml/2006/main">
               <a:ext uri="{FF2B5EF4-FFF2-40B4-BE49-F238E27FC236}">
-                <a16:creationId xmlns:a16="http://schemas.microsoft.com/office/drawing/2014/main" id="{9CADE8FF-8502-4BFE-80BC-D4F8FDAF2F9A}"/>
+                <a16:creationId xmlns:a16="http://schemas.microsoft.com/office/drawing/2014/main" id="{A67502B8-B52D-4434-A2DB-B792CD1E36DB}"/>
               </a:ext>
             </a:extLst>
           </p:cNvPr>
@@ -2751,7 +2751,7 @@
           <p:cNvPr id="8" name="">
             <a:extLst xmlns:a="http://schemas.openxmlformats.org/drawingml/2006/main">
               <a:ext uri="{FF2B5EF4-FFF2-40B4-BE49-F238E27FC236}">
-                <a16:creationId xmlns:a16="http://schemas.microsoft.com/office/drawing/2014/main" id="{8F42FF79-1009-4E85-BAB0-413B66422F24}"/>
+                <a16:creationId xmlns:a16="http://schemas.microsoft.com/office/drawing/2014/main" id="{7BF5E292-3EB0-4749-AEF7-37CA629EFFE4}"/>
               </a:ext>
             </a:extLst>
           </p:cNvPr>
@@ -2808,7 +2808,7 @@
           <p:cNvPr id="9" name="">
             <a:extLst xmlns:a="http://schemas.openxmlformats.org/drawingml/2006/main">
               <a:ext uri="{FF2B5EF4-FFF2-40B4-BE49-F238E27FC236}">
-                <a16:creationId xmlns:a16="http://schemas.microsoft.com/office/drawing/2014/main" id="{5DA71791-2A9B-4040-94B8-C4D66E9A88EA}"/>
+                <a16:creationId xmlns:a16="http://schemas.microsoft.com/office/drawing/2014/main" id="{13EB31B7-DDB6-4D95-9B51-44FA5656B2F3}"/>
               </a:ext>
             </a:extLst>
           </p:cNvPr>
@@ -2865,7 +2865,7 @@
           <p:cNvPr id="10" name="">
             <a:extLst xmlns:a="http://schemas.openxmlformats.org/drawingml/2006/main">
               <a:ext uri="{FF2B5EF4-FFF2-40B4-BE49-F238E27FC236}">
-                <a16:creationId xmlns:a16="http://schemas.microsoft.com/office/drawing/2014/main" id="{4D4831A7-D8B1-4F78-952F-581A021755B4}"/>
+                <a16:creationId xmlns:a16="http://schemas.microsoft.com/office/drawing/2014/main" id="{ABBC8F60-57AD-4282-97EB-FC773D67DF55}"/>
               </a:ext>
             </a:extLst>
           </p:cNvPr>
@@ -2922,7 +2922,7 @@
           <p:cNvPr id="11" name="">
             <a:extLst xmlns:a="http://schemas.openxmlformats.org/drawingml/2006/main">
               <a:ext uri="{FF2B5EF4-FFF2-40B4-BE49-F238E27FC236}">
-                <a16:creationId xmlns:a16="http://schemas.microsoft.com/office/drawing/2014/main" id="{CEC54BAC-BEF3-4014-BE8A-75388BB855ED}"/>
+                <a16:creationId xmlns:a16="http://schemas.microsoft.com/office/drawing/2014/main" id="{C909CD76-EC32-4B87-9016-12FD3B0CDD57}"/>
               </a:ext>
             </a:extLst>
           </p:cNvPr>
@@ -2979,7 +2979,7 @@
           <p:cNvPr id="12" name="">
             <a:extLst xmlns:a="http://schemas.openxmlformats.org/drawingml/2006/main">
               <a:ext uri="{FF2B5EF4-FFF2-40B4-BE49-F238E27FC236}">
-                <a16:creationId xmlns:a16="http://schemas.microsoft.com/office/drawing/2014/main" id="{8B4992DE-461A-4AF7-8AD1-3118945378AE}"/>
+                <a16:creationId xmlns:a16="http://schemas.microsoft.com/office/drawing/2014/main" id="{013468D3-655A-48FE-8304-2A086DC53C19}"/>
               </a:ext>
             </a:extLst>
           </p:cNvPr>
@@ -3036,7 +3036,7 @@
           <p:cNvPr id="13" name="">
             <a:extLst xmlns:a="http://schemas.openxmlformats.org/drawingml/2006/main">
               <a:ext uri="{FF2B5EF4-FFF2-40B4-BE49-F238E27FC236}">
-                <a16:creationId xmlns:a16="http://schemas.microsoft.com/office/drawing/2014/main" id="{8B7A877E-5F1D-4C27-B42A-EA46E5CC73CA}"/>
+                <a16:creationId xmlns:a16="http://schemas.microsoft.com/office/drawing/2014/main" id="{4C723262-07C9-4A8C-B975-CC26AF64BE80}"/>
               </a:ext>
             </a:extLst>
           </p:cNvPr>
@@ -3091,7 +3091,7 @@
     </p:spTree>
     <p:extLst>
       <p:ext uri="{BB962C8B-B14F-4D97-AF65-F5344CB8AC3E}">
-        <p14:creationId xmlns:p14="http://schemas.microsoft.com/office/powerpoint/2010/main" val="1778700668"/>
+        <p14:creationId xmlns:p14="http://schemas.microsoft.com/office/powerpoint/2010/main" val="342263040"/>
       </p:ext>
     </p:extLst>
   </p:cSld>
@@ -3292,7 +3292,7 @@
           <p:cNvPr id="19" name="">
             <a:extLst xmlns:a="http://schemas.openxmlformats.org/drawingml/2006/main">
               <a:ext uri="{FF2B5EF4-FFF2-40B4-BE49-F238E27FC236}">
-                <a16:creationId xmlns:a16="http://schemas.microsoft.com/office/drawing/2014/main" id="{8C172B8D-40BD-49CA-A684-87368434E995}"/>
+                <a16:creationId xmlns:a16="http://schemas.microsoft.com/office/drawing/2014/main" id="{524C8A03-EC4A-4F4A-9E13-464FB1C62868}"/>
               </a:ext>
             </a:extLst>
           </p:cNvPr>
@@ -3324,7 +3324,7 @@
           <p:cNvPr id="2" name="">
             <a:extLst xmlns:a="http://schemas.openxmlformats.org/drawingml/2006/main">
               <a:ext uri="{FF2B5EF4-FFF2-40B4-BE49-F238E27FC236}">
-                <a16:creationId xmlns:a16="http://schemas.microsoft.com/office/drawing/2014/main" id="{339D7672-D9C9-41B9-9ABA-3DAAC89B4259}"/>
+                <a16:creationId xmlns:a16="http://schemas.microsoft.com/office/drawing/2014/main" id="{41533535-8275-4376-A61D-AA28E877AFF0}"/>
               </a:ext>
             </a:extLst>
           </p:cNvPr>
@@ -3381,7 +3381,7 @@
           <p:cNvPr id="3" name="">
             <a:extLst xmlns:a="http://schemas.openxmlformats.org/drawingml/2006/main">
               <a:ext uri="{FF2B5EF4-FFF2-40B4-BE49-F238E27FC236}">
-                <a16:creationId xmlns:a16="http://schemas.microsoft.com/office/drawing/2014/main" id="{E863231F-2F86-4B7A-9FC1-D8B28D0B6B57}"/>
+                <a16:creationId xmlns:a16="http://schemas.microsoft.com/office/drawing/2014/main" id="{9AFCC4DF-62F7-40F5-8264-E221EF4DFE83}"/>
               </a:ext>
             </a:extLst>
           </p:cNvPr>
@@ -3413,7 +3413,7 @@
           <p:cNvPr id="4" name="">
             <a:extLst xmlns:a="http://schemas.openxmlformats.org/drawingml/2006/main">
               <a:ext uri="{FF2B5EF4-FFF2-40B4-BE49-F238E27FC236}">
-                <a16:creationId xmlns:a16="http://schemas.microsoft.com/office/drawing/2014/main" id="{AFC4F47D-ECD8-4FB6-BD9E-06B6881E0E66}"/>
+                <a16:creationId xmlns:a16="http://schemas.microsoft.com/office/drawing/2014/main" id="{44C69EA5-AE11-49C3-9A69-5F1EF9503399}"/>
               </a:ext>
             </a:extLst>
           </p:cNvPr>
@@ -3470,7 +3470,7 @@
           <p:cNvPr id="5" name="">
             <a:extLst xmlns:a="http://schemas.openxmlformats.org/drawingml/2006/main">
               <a:ext uri="{FF2B5EF4-FFF2-40B4-BE49-F238E27FC236}">
-                <a16:creationId xmlns:a16="http://schemas.microsoft.com/office/drawing/2014/main" id="{414E984A-606D-4E40-A298-127FE560334C}"/>
+                <a16:creationId xmlns:a16="http://schemas.microsoft.com/office/drawing/2014/main" id="{1C9316FA-1756-40F4-A50C-461A80FC8276}"/>
               </a:ext>
             </a:extLst>
           </p:cNvPr>
@@ -3527,7 +3527,7 @@
           <p:cNvPr id="6" name="">
             <a:extLst xmlns:a="http://schemas.openxmlformats.org/drawingml/2006/main">
               <a:ext uri="{FF2B5EF4-FFF2-40B4-BE49-F238E27FC236}">
-                <a16:creationId xmlns:a16="http://schemas.microsoft.com/office/drawing/2014/main" id="{C1B571BF-B024-4094-8ED8-A7EE30991C21}"/>
+                <a16:creationId xmlns:a16="http://schemas.microsoft.com/office/drawing/2014/main" id="{8059AD1F-91A3-49C2-86C6-77329F2F71A4}"/>
               </a:ext>
             </a:extLst>
           </p:cNvPr>
@@ -3584,7 +3584,7 @@
           <p:cNvPr id="7" name="">
             <a:extLst xmlns:a="http://schemas.openxmlformats.org/drawingml/2006/main">
               <a:ext uri="{FF2B5EF4-FFF2-40B4-BE49-F238E27FC236}">
-                <a16:creationId xmlns:a16="http://schemas.microsoft.com/office/drawing/2014/main" id="{C6403C82-7EEC-4E46-A6B0-4DEF72E73DBB}"/>
+                <a16:creationId xmlns:a16="http://schemas.microsoft.com/office/drawing/2014/main" id="{B6199EDF-C532-4EA2-A6F5-18DD923B30EF}"/>
               </a:ext>
             </a:extLst>
           </p:cNvPr>
@@ -3616,7 +3616,7 @@
           <p:cNvPr id="8" name="">
             <a:extLst xmlns:a="http://schemas.openxmlformats.org/drawingml/2006/main">
               <a:ext uri="{FF2B5EF4-FFF2-40B4-BE49-F238E27FC236}">
-                <a16:creationId xmlns:a16="http://schemas.microsoft.com/office/drawing/2014/main" id="{503FD061-33A1-4D4D-BD57-C72B640AE605}"/>
+                <a16:creationId xmlns:a16="http://schemas.microsoft.com/office/drawing/2014/main" id="{80E9599C-BE1F-41E0-ACB6-00A79F458F0C}"/>
               </a:ext>
             </a:extLst>
           </p:cNvPr>
@@ -3673,7 +3673,7 @@
           <p:cNvPr id="9" name="">
             <a:extLst xmlns:a="http://schemas.openxmlformats.org/drawingml/2006/main">
               <a:ext uri="{FF2B5EF4-FFF2-40B4-BE49-F238E27FC236}">
-                <a16:creationId xmlns:a16="http://schemas.microsoft.com/office/drawing/2014/main" id="{0E7CD1B6-C989-4691-8111-096EA5C8318F}"/>
+                <a16:creationId xmlns:a16="http://schemas.microsoft.com/office/drawing/2014/main" id="{87A8AFEB-5CC9-4949-BD62-58C07CA6D628}"/>
               </a:ext>
             </a:extLst>
           </p:cNvPr>
@@ -3730,7 +3730,7 @@
           <p:cNvPr id="10" name="">
             <a:extLst xmlns:a="http://schemas.openxmlformats.org/drawingml/2006/main">
               <a:ext uri="{FF2B5EF4-FFF2-40B4-BE49-F238E27FC236}">
-                <a16:creationId xmlns:a16="http://schemas.microsoft.com/office/drawing/2014/main" id="{848CFA1B-F8B3-42EB-9AF0-8108EF3F0DB7}"/>
+                <a16:creationId xmlns:a16="http://schemas.microsoft.com/office/drawing/2014/main" id="{E1315CFB-BA25-47FF-8F99-CC0421E6F649}"/>
               </a:ext>
             </a:extLst>
           </p:cNvPr>
@@ -3787,7 +3787,7 @@
           <p:cNvPr id="11" name="">
             <a:extLst xmlns:a="http://schemas.openxmlformats.org/drawingml/2006/main">
               <a:ext uri="{FF2B5EF4-FFF2-40B4-BE49-F238E27FC236}">
-                <a16:creationId xmlns:a16="http://schemas.microsoft.com/office/drawing/2014/main" id="{7BFB8833-3B06-47EE-9E4E-ECBEC75A42C6}"/>
+                <a16:creationId xmlns:a16="http://schemas.microsoft.com/office/drawing/2014/main" id="{6D1F762F-7886-47E1-A6C3-8C987B42F2B7}"/>
               </a:ext>
             </a:extLst>
           </p:cNvPr>
@@ -3821,7 +3821,7 @@
           <p:cNvPr id="12" name="">
             <a:extLst xmlns:a="http://schemas.openxmlformats.org/drawingml/2006/main">
               <a:ext uri="{FF2B5EF4-FFF2-40B4-BE49-F238E27FC236}">
-                <a16:creationId xmlns:a16="http://schemas.microsoft.com/office/drawing/2014/main" id="{CA5FDFC2-F0D0-453A-AB93-8362620BF3FD}"/>
+                <a16:creationId xmlns:a16="http://schemas.microsoft.com/office/drawing/2014/main" id="{5F426A1F-90FE-41E9-BE7D-61195AA40140}"/>
               </a:ext>
             </a:extLst>
           </p:cNvPr>
@@ -3878,7 +3878,7 @@
           <p:cNvPr id="13" name="">
             <a:extLst xmlns:a="http://schemas.openxmlformats.org/drawingml/2006/main">
               <a:ext uri="{FF2B5EF4-FFF2-40B4-BE49-F238E27FC236}">
-                <a16:creationId xmlns:a16="http://schemas.microsoft.com/office/drawing/2014/main" id="{71BAC268-06C0-45C8-B9E9-435E7BC15B99}"/>
+                <a16:creationId xmlns:a16="http://schemas.microsoft.com/office/drawing/2014/main" id="{378BCFFF-A3CC-411C-99CC-C7E019EF5442}"/>
               </a:ext>
             </a:extLst>
           </p:cNvPr>
@@ -3935,7 +3935,7 @@
           <p:cNvPr id="14" name="">
             <a:extLst xmlns:a="http://schemas.openxmlformats.org/drawingml/2006/main">
               <a:ext uri="{FF2B5EF4-FFF2-40B4-BE49-F238E27FC236}">
-                <a16:creationId xmlns:a16="http://schemas.microsoft.com/office/drawing/2014/main" id="{6992704E-D59C-49EB-8B3B-8A9B650FA712}"/>
+                <a16:creationId xmlns:a16="http://schemas.microsoft.com/office/drawing/2014/main" id="{29F8D6BA-2366-4E5E-96FF-FCDD5653EC63}"/>
               </a:ext>
             </a:extLst>
           </p:cNvPr>
@@ -3992,7 +3992,7 @@
           <p:cNvPr id="15" name="">
             <a:extLst xmlns:a="http://schemas.openxmlformats.org/drawingml/2006/main">
               <a:ext uri="{FF2B5EF4-FFF2-40B4-BE49-F238E27FC236}">
-                <a16:creationId xmlns:a16="http://schemas.microsoft.com/office/drawing/2014/main" id="{A6354446-3535-4A2D-AEA8-C2A9A5F000E6}"/>
+                <a16:creationId xmlns:a16="http://schemas.microsoft.com/office/drawing/2014/main" id="{6D632E13-C9AC-4FF1-B190-AB205DA23548}"/>
               </a:ext>
             </a:extLst>
           </p:cNvPr>
@@ -4026,7 +4026,7 @@
           <p:cNvPr id="16" name="">
             <a:extLst xmlns:a="http://schemas.openxmlformats.org/drawingml/2006/main">
               <a:ext uri="{FF2B5EF4-FFF2-40B4-BE49-F238E27FC236}">
-                <a16:creationId xmlns:a16="http://schemas.microsoft.com/office/drawing/2014/main" id="{705D7CEF-DF17-4D9A-9316-F17BAF9CDB91}"/>
+                <a16:creationId xmlns:a16="http://schemas.microsoft.com/office/drawing/2014/main" id="{3B52E2D8-668C-4A83-9144-BE684FA1B40C}"/>
               </a:ext>
             </a:extLst>
           </p:cNvPr>
@@ -4083,7 +4083,7 @@
           <p:cNvPr id="17" name="">
             <a:extLst xmlns:a="http://schemas.openxmlformats.org/drawingml/2006/main">
               <a:ext uri="{FF2B5EF4-FFF2-40B4-BE49-F238E27FC236}">
-                <a16:creationId xmlns:a16="http://schemas.microsoft.com/office/drawing/2014/main" id="{E167D707-11C0-4D5B-B2F6-E9F4A7860227}"/>
+                <a16:creationId xmlns:a16="http://schemas.microsoft.com/office/drawing/2014/main" id="{29BF0324-CCDF-49C1-A878-CFD09022540E}"/>
               </a:ext>
             </a:extLst>
           </p:cNvPr>
@@ -4140,7 +4140,7 @@
           <p:cNvPr id="18" name="">
             <a:extLst xmlns:a="http://schemas.openxmlformats.org/drawingml/2006/main">
               <a:ext uri="{FF2B5EF4-FFF2-40B4-BE49-F238E27FC236}">
-                <a16:creationId xmlns:a16="http://schemas.microsoft.com/office/drawing/2014/main" id="{05EBA008-A2F2-4FEB-A65A-0B239FF1ED79}"/>
+                <a16:creationId xmlns:a16="http://schemas.microsoft.com/office/drawing/2014/main" id="{F7D89841-1FDE-490F-B81E-181F84B422D8}"/>
               </a:ext>
             </a:extLst>
           </p:cNvPr>
@@ -4195,7 +4195,7 @@
     </p:spTree>
     <p:extLst>
       <p:ext uri="{BB962C8B-B14F-4D97-AF65-F5344CB8AC3E}">
-        <p14:creationId xmlns:p14="http://schemas.microsoft.com/office/powerpoint/2010/main" val="1709435110"/>
+        <p14:creationId xmlns:p14="http://schemas.microsoft.com/office/powerpoint/2010/main" val="594950620"/>
       </p:ext>
     </p:extLst>
   </p:cSld>
@@ -4350,7 +4350,7 @@
           <p:cNvPr id="23" name="">
             <a:extLst xmlns:a="http://schemas.openxmlformats.org/drawingml/2006/main">
               <a:ext uri="{FF2B5EF4-FFF2-40B4-BE49-F238E27FC236}">
-                <a16:creationId xmlns:a16="http://schemas.microsoft.com/office/drawing/2014/main" id="{5C549DC7-BD47-49F2-B21C-76F7877D0DFC}"/>
+                <a16:creationId xmlns:a16="http://schemas.microsoft.com/office/drawing/2014/main" id="{2877E5EF-1FE9-4B32-BAC4-36A91F16E6FB}"/>
               </a:ext>
             </a:extLst>
           </p:cNvPr>
@@ -4382,7 +4382,7 @@
           <p:cNvPr id="2" name="">
             <a:extLst xmlns:a="http://schemas.openxmlformats.org/drawingml/2006/main">
               <a:ext uri="{FF2B5EF4-FFF2-40B4-BE49-F238E27FC236}">
-                <a16:creationId xmlns:a16="http://schemas.microsoft.com/office/drawing/2014/main" id="{E6DF035D-1FFF-45FA-9C88-42E449D50FAC}"/>
+                <a16:creationId xmlns:a16="http://schemas.microsoft.com/office/drawing/2014/main" id="{02BDC6A6-E576-4144-A490-F328875C9CED}"/>
               </a:ext>
             </a:extLst>
           </p:cNvPr>
@@ -4439,7 +4439,7 @@
           <p:cNvPr id="3" name="">
             <a:extLst xmlns:a="http://schemas.openxmlformats.org/drawingml/2006/main">
               <a:ext uri="{FF2B5EF4-FFF2-40B4-BE49-F238E27FC236}">
-                <a16:creationId xmlns:a16="http://schemas.microsoft.com/office/drawing/2014/main" id="{771FE0C4-3890-4FFB-AB20-14A5E1E0D24E}"/>
+                <a16:creationId xmlns:a16="http://schemas.microsoft.com/office/drawing/2014/main" id="{63737F18-F85B-42D5-992C-FFE5A66DB9EB}"/>
               </a:ext>
             </a:extLst>
           </p:cNvPr>
@@ -4471,7 +4471,7 @@
           <p:cNvPr id="4" name="">
             <a:extLst xmlns:a="http://schemas.openxmlformats.org/drawingml/2006/main">
               <a:ext uri="{FF2B5EF4-FFF2-40B4-BE49-F238E27FC236}">
-                <a16:creationId xmlns:a16="http://schemas.microsoft.com/office/drawing/2014/main" id="{0D8C3F76-E95D-480F-8FE6-7AAC8E7626C4}"/>
+                <a16:creationId xmlns:a16="http://schemas.microsoft.com/office/drawing/2014/main" id="{FAE59F97-A032-4211-892C-DE1C247AB8FD}"/>
               </a:ext>
             </a:extLst>
           </p:cNvPr>
@@ -4528,7 +4528,7 @@
           <p:cNvPr id="5" name="">
             <a:extLst xmlns:a="http://schemas.openxmlformats.org/drawingml/2006/main">
               <a:ext uri="{FF2B5EF4-FFF2-40B4-BE49-F238E27FC236}">
-                <a16:creationId xmlns:a16="http://schemas.microsoft.com/office/drawing/2014/main" id="{C05081DD-1678-4514-AF9F-D33FA0BCC130}"/>
+                <a16:creationId xmlns:a16="http://schemas.microsoft.com/office/drawing/2014/main" id="{7C7CA0D9-16EB-4E49-93C8-E8B54FD8A910}"/>
               </a:ext>
             </a:extLst>
           </p:cNvPr>
@@ -4585,7 +4585,7 @@
           <p:cNvPr id="6" name="">
             <a:extLst xmlns:a="http://schemas.openxmlformats.org/drawingml/2006/main">
               <a:ext uri="{FF2B5EF4-FFF2-40B4-BE49-F238E27FC236}">
-                <a16:creationId xmlns:a16="http://schemas.microsoft.com/office/drawing/2014/main" id="{1F0C1194-F3A4-42BB-A5A7-997F32F94194}"/>
+                <a16:creationId xmlns:a16="http://schemas.microsoft.com/office/drawing/2014/main" id="{0E3181D6-E8A4-4ED4-A1EB-221C1F529ACA}"/>
               </a:ext>
             </a:extLst>
           </p:cNvPr>
@@ -4642,7 +4642,7 @@
           <p:cNvPr id="7" name="">
             <a:extLst xmlns:a="http://schemas.openxmlformats.org/drawingml/2006/main">
               <a:ext uri="{FF2B5EF4-FFF2-40B4-BE49-F238E27FC236}">
-                <a16:creationId xmlns:a16="http://schemas.microsoft.com/office/drawing/2014/main" id="{08D294A3-45B1-46D9-BF85-73D640A1B8D4}"/>
+                <a16:creationId xmlns:a16="http://schemas.microsoft.com/office/drawing/2014/main" id="{E09971D0-B780-44A5-8A81-4F0FF54C4186}"/>
               </a:ext>
             </a:extLst>
           </p:cNvPr>
@@ -4674,7 +4674,7 @@
           <p:cNvPr id="8" name="">
             <a:extLst xmlns:a="http://schemas.openxmlformats.org/drawingml/2006/main">
               <a:ext uri="{FF2B5EF4-FFF2-40B4-BE49-F238E27FC236}">
-                <a16:creationId xmlns:a16="http://schemas.microsoft.com/office/drawing/2014/main" id="{59EDE646-A151-48B7-8F4E-1F6BC2A2599B}"/>
+                <a16:creationId xmlns:a16="http://schemas.microsoft.com/office/drawing/2014/main" id="{556EFBA0-FD2B-4F00-B3FF-683D4EF2F7A2}"/>
               </a:ext>
             </a:extLst>
           </p:cNvPr>
@@ -4731,7 +4731,7 @@
           <p:cNvPr id="9" name="">
             <a:extLst xmlns:a="http://schemas.openxmlformats.org/drawingml/2006/main">
               <a:ext uri="{FF2B5EF4-FFF2-40B4-BE49-F238E27FC236}">
-                <a16:creationId xmlns:a16="http://schemas.microsoft.com/office/drawing/2014/main" id="{7BF77FE0-B82D-4BEF-8A8E-44CC0654D71C}"/>
+                <a16:creationId xmlns:a16="http://schemas.microsoft.com/office/drawing/2014/main" id="{FFDF808A-AFF5-4B05-A9A2-C14ED7F77070}"/>
               </a:ext>
             </a:extLst>
           </p:cNvPr>
@@ -4788,7 +4788,7 @@
           <p:cNvPr id="10" name="">
             <a:extLst xmlns:a="http://schemas.openxmlformats.org/drawingml/2006/main">
               <a:ext uri="{FF2B5EF4-FFF2-40B4-BE49-F238E27FC236}">
-                <a16:creationId xmlns:a16="http://schemas.microsoft.com/office/drawing/2014/main" id="{91022A78-E138-488D-89D0-6CAD49F7DB90}"/>
+                <a16:creationId xmlns:a16="http://schemas.microsoft.com/office/drawing/2014/main" id="{ED5853C5-7740-4E10-89C9-556B3E5714E7}"/>
               </a:ext>
             </a:extLst>
           </p:cNvPr>
@@ -4822,7 +4822,7 @@
           <p:cNvPr id="11" name="">
             <a:extLst xmlns:a="http://schemas.openxmlformats.org/drawingml/2006/main">
               <a:ext uri="{FF2B5EF4-FFF2-40B4-BE49-F238E27FC236}">
-                <a16:creationId xmlns:a16="http://schemas.microsoft.com/office/drawing/2014/main" id="{C887C87C-533D-4EA8-9444-61FD0C4754BE}"/>
+                <a16:creationId xmlns:a16="http://schemas.microsoft.com/office/drawing/2014/main" id="{B69968D9-E28E-4257-9299-211E9EBCC14F}"/>
               </a:ext>
             </a:extLst>
           </p:cNvPr>
@@ -4854,7 +4854,7 @@
           <p:cNvPr id="12" name="">
             <a:extLst xmlns:a="http://schemas.openxmlformats.org/drawingml/2006/main">
               <a:ext uri="{FF2B5EF4-FFF2-40B4-BE49-F238E27FC236}">
-                <a16:creationId xmlns:a16="http://schemas.microsoft.com/office/drawing/2014/main" id="{6411D398-3593-4752-A8FB-5FE9D4FF1348}"/>
+                <a16:creationId xmlns:a16="http://schemas.microsoft.com/office/drawing/2014/main" id="{420BDF91-7B86-4286-8AC7-C71B62098209}"/>
               </a:ext>
             </a:extLst>
           </p:cNvPr>
@@ -4911,7 +4911,7 @@
           <p:cNvPr id="13" name="">
             <a:extLst xmlns:a="http://schemas.openxmlformats.org/drawingml/2006/main">
               <a:ext uri="{FF2B5EF4-FFF2-40B4-BE49-F238E27FC236}">
-                <a16:creationId xmlns:a16="http://schemas.microsoft.com/office/drawing/2014/main" id="{99E2360D-DD82-4E07-995E-19DC51CFC816}"/>
+                <a16:creationId xmlns:a16="http://schemas.microsoft.com/office/drawing/2014/main" id="{A0641E3B-1F29-43E2-AF27-FF8E84BB7BF3}"/>
               </a:ext>
             </a:extLst>
           </p:cNvPr>
@@ -4968,7 +4968,7 @@
           <p:cNvPr id="14" name="">
             <a:extLst xmlns:a="http://schemas.openxmlformats.org/drawingml/2006/main">
               <a:ext uri="{FF2B5EF4-FFF2-40B4-BE49-F238E27FC236}">
-                <a16:creationId xmlns:a16="http://schemas.microsoft.com/office/drawing/2014/main" id="{CC9DF742-33FC-49F9-A6D1-266D92253CD0}"/>
+                <a16:creationId xmlns:a16="http://schemas.microsoft.com/office/drawing/2014/main" id="{0F920856-4A78-4708-99F0-F799326BF553}"/>
               </a:ext>
             </a:extLst>
           </p:cNvPr>
@@ -5002,7 +5002,7 @@
           <p:cNvPr id="15" name="">
             <a:extLst xmlns:a="http://schemas.openxmlformats.org/drawingml/2006/main">
               <a:ext uri="{FF2B5EF4-FFF2-40B4-BE49-F238E27FC236}">
-                <a16:creationId xmlns:a16="http://schemas.microsoft.com/office/drawing/2014/main" id="{1EE387C7-CB7F-4F09-BA2C-C5ABB97917C3}"/>
+                <a16:creationId xmlns:a16="http://schemas.microsoft.com/office/drawing/2014/main" id="{B2F14D19-4F42-402A-9D88-F680518394C8}"/>
               </a:ext>
             </a:extLst>
           </p:cNvPr>
@@ -5034,7 +5034,7 @@
           <p:cNvPr id="16" name="">
             <a:extLst xmlns:a="http://schemas.openxmlformats.org/drawingml/2006/main">
               <a:ext uri="{FF2B5EF4-FFF2-40B4-BE49-F238E27FC236}">
-                <a16:creationId xmlns:a16="http://schemas.microsoft.com/office/drawing/2014/main" id="{CF524E8F-AA51-4A7E-A13A-D177991AD9B6}"/>
+                <a16:creationId xmlns:a16="http://schemas.microsoft.com/office/drawing/2014/main" id="{D79F4572-B62F-4BCB-ABF0-3D1D438DD6CF}"/>
               </a:ext>
             </a:extLst>
           </p:cNvPr>
@@ -5091,7 +5091,7 @@
           <p:cNvPr id="17" name="">
             <a:extLst xmlns:a="http://schemas.openxmlformats.org/drawingml/2006/main">
               <a:ext uri="{FF2B5EF4-FFF2-40B4-BE49-F238E27FC236}">
-                <a16:creationId xmlns:a16="http://schemas.microsoft.com/office/drawing/2014/main" id="{292CDBAF-E46D-44DA-AC6C-EF41341347CB}"/>
+                <a16:creationId xmlns:a16="http://schemas.microsoft.com/office/drawing/2014/main" id="{57D331EC-6102-41CF-A631-AB7D43E1A635}"/>
               </a:ext>
             </a:extLst>
           </p:cNvPr>
@@ -5148,7 +5148,7 @@
           <p:cNvPr id="18" name="">
             <a:extLst xmlns:a="http://schemas.openxmlformats.org/drawingml/2006/main">
               <a:ext uri="{FF2B5EF4-FFF2-40B4-BE49-F238E27FC236}">
-                <a16:creationId xmlns:a16="http://schemas.microsoft.com/office/drawing/2014/main" id="{620A63AC-AA0D-40A1-A73D-C44388171718}"/>
+                <a16:creationId xmlns:a16="http://schemas.microsoft.com/office/drawing/2014/main" id="{35648875-D950-4492-B259-BAA23332EBBC}"/>
               </a:ext>
             </a:extLst>
           </p:cNvPr>
@@ -5182,7 +5182,7 @@
           <p:cNvPr id="19" name="">
             <a:extLst xmlns:a="http://schemas.openxmlformats.org/drawingml/2006/main">
               <a:ext uri="{FF2B5EF4-FFF2-40B4-BE49-F238E27FC236}">
-                <a16:creationId xmlns:a16="http://schemas.microsoft.com/office/drawing/2014/main" id="{ED29DF47-8B38-4846-9421-094818D58560}"/>
+                <a16:creationId xmlns:a16="http://schemas.microsoft.com/office/drawing/2014/main" id="{447AEA44-4335-44B0-AC9E-087DD8174FDD}"/>
               </a:ext>
             </a:extLst>
           </p:cNvPr>
@@ -5214,7 +5214,7 @@
           <p:cNvPr id="20" name="">
             <a:extLst xmlns:a="http://schemas.openxmlformats.org/drawingml/2006/main">
               <a:ext uri="{FF2B5EF4-FFF2-40B4-BE49-F238E27FC236}">
-                <a16:creationId xmlns:a16="http://schemas.microsoft.com/office/drawing/2014/main" id="{DFD77C78-8A73-4BB4-BB82-3692AF00DC9D}"/>
+                <a16:creationId xmlns:a16="http://schemas.microsoft.com/office/drawing/2014/main" id="{D72265C5-6A5C-441D-AF65-CA5C393AFB03}"/>
               </a:ext>
             </a:extLst>
           </p:cNvPr>
@@ -5271,7 +5271,7 @@
           <p:cNvPr id="21" name="">
             <a:extLst xmlns:a="http://schemas.openxmlformats.org/drawingml/2006/main">
               <a:ext uri="{FF2B5EF4-FFF2-40B4-BE49-F238E27FC236}">
-                <a16:creationId xmlns:a16="http://schemas.microsoft.com/office/drawing/2014/main" id="{CE85948D-07E1-4869-8CC4-071A078D0B70}"/>
+                <a16:creationId xmlns:a16="http://schemas.microsoft.com/office/drawing/2014/main" id="{CE16D497-5105-44A0-96AF-80A90069975D}"/>
               </a:ext>
             </a:extLst>
           </p:cNvPr>
@@ -5328,7 +5328,7 @@
           <p:cNvPr id="22" name="">
             <a:extLst xmlns:a="http://schemas.openxmlformats.org/drawingml/2006/main">
               <a:ext uri="{FF2B5EF4-FFF2-40B4-BE49-F238E27FC236}">
-                <a16:creationId xmlns:a16="http://schemas.microsoft.com/office/drawing/2014/main" id="{B2F89C50-4DBB-411B-A5C0-344DD1BC614D}"/>
+                <a16:creationId xmlns:a16="http://schemas.microsoft.com/office/drawing/2014/main" id="{08E00ABA-FE53-451F-BD91-C51B80AC1800}"/>
               </a:ext>
             </a:extLst>
           </p:cNvPr>
@@ -5383,7 +5383,7 @@
     </p:spTree>
     <p:extLst>
       <p:ext uri="{BB962C8B-B14F-4D97-AF65-F5344CB8AC3E}">
-        <p14:creationId xmlns:p14="http://schemas.microsoft.com/office/powerpoint/2010/main" val="1144994180"/>
+        <p14:creationId xmlns:p14="http://schemas.microsoft.com/office/powerpoint/2010/main" val="1302612806"/>
       </p:ext>
     </p:extLst>
   </p:cSld>
@@ -5584,7 +5584,7 @@
           <p:cNvPr id="23" name="">
             <a:extLst xmlns:a="http://schemas.openxmlformats.org/drawingml/2006/main">
               <a:ext uri="{FF2B5EF4-FFF2-40B4-BE49-F238E27FC236}">
-                <a16:creationId xmlns:a16="http://schemas.microsoft.com/office/drawing/2014/main" id="{60C698E9-7E0B-4717-89C0-2943C087F0D1}"/>
+                <a16:creationId xmlns:a16="http://schemas.microsoft.com/office/drawing/2014/main" id="{BF635BEE-1230-4925-AA0C-196AA8FC0903}"/>
               </a:ext>
             </a:extLst>
           </p:cNvPr>
@@ -5616,7 +5616,7 @@
           <p:cNvPr id="2" name="">
             <a:extLst xmlns:a="http://schemas.openxmlformats.org/drawingml/2006/main">
               <a:ext uri="{FF2B5EF4-FFF2-40B4-BE49-F238E27FC236}">
-                <a16:creationId xmlns:a16="http://schemas.microsoft.com/office/drawing/2014/main" id="{400C82B5-310D-4D68-BDAD-C0404BA48AC4}"/>
+                <a16:creationId xmlns:a16="http://schemas.microsoft.com/office/drawing/2014/main" id="{8B9D7A2D-9F96-4675-80E3-463B288E6B30}"/>
               </a:ext>
             </a:extLst>
           </p:cNvPr>
@@ -5673,7 +5673,7 @@
           <p:cNvPr id="3" name="">
             <a:extLst xmlns:a="http://schemas.openxmlformats.org/drawingml/2006/main">
               <a:ext uri="{FF2B5EF4-FFF2-40B4-BE49-F238E27FC236}">
-                <a16:creationId xmlns:a16="http://schemas.microsoft.com/office/drawing/2014/main" id="{8F244D57-8AFB-4597-A6AB-3E05A2EE5B95}"/>
+                <a16:creationId xmlns:a16="http://schemas.microsoft.com/office/drawing/2014/main" id="{5518DB16-B106-4C87-B53B-853CBE8585F2}"/>
               </a:ext>
             </a:extLst>
           </p:cNvPr>
@@ -5705,7 +5705,7 @@
           <p:cNvPr id="4" name="">
             <a:extLst xmlns:a="http://schemas.openxmlformats.org/drawingml/2006/main">
               <a:ext uri="{FF2B5EF4-FFF2-40B4-BE49-F238E27FC236}">
-                <a16:creationId xmlns:a16="http://schemas.microsoft.com/office/drawing/2014/main" id="{DDB2EF71-153B-4DF2-A537-4CC4558AB90C}"/>
+                <a16:creationId xmlns:a16="http://schemas.microsoft.com/office/drawing/2014/main" id="{A9651CC7-E31A-46A3-8453-2291127C8C13}"/>
               </a:ext>
             </a:extLst>
           </p:cNvPr>
@@ -5762,7 +5762,7 @@
           <p:cNvPr id="5" name="">
             <a:extLst xmlns:a="http://schemas.openxmlformats.org/drawingml/2006/main">
               <a:ext uri="{FF2B5EF4-FFF2-40B4-BE49-F238E27FC236}">
-                <a16:creationId xmlns:a16="http://schemas.microsoft.com/office/drawing/2014/main" id="{E5B39C8B-78B0-41A5-9985-75EC79F99239}"/>
+                <a16:creationId xmlns:a16="http://schemas.microsoft.com/office/drawing/2014/main" id="{88597A5B-60C2-4920-BA6B-F8D1CB57DE2E}"/>
               </a:ext>
             </a:extLst>
           </p:cNvPr>
@@ -5819,7 +5819,7 @@
           <p:cNvPr id="6" name="">
             <a:extLst xmlns:a="http://schemas.openxmlformats.org/drawingml/2006/main">
               <a:ext uri="{FF2B5EF4-FFF2-40B4-BE49-F238E27FC236}">
-                <a16:creationId xmlns:a16="http://schemas.microsoft.com/office/drawing/2014/main" id="{B2B872A0-D1B8-4648-98A4-1385C97D2BE3}"/>
+                <a16:creationId xmlns:a16="http://schemas.microsoft.com/office/drawing/2014/main" id="{0299AC43-7BC0-4CFB-AA3B-6651DF07720D}"/>
               </a:ext>
             </a:extLst>
           </p:cNvPr>
@@ -5876,7 +5876,7 @@
           <p:cNvPr id="7" name="">
             <a:extLst xmlns:a="http://schemas.openxmlformats.org/drawingml/2006/main">
               <a:ext uri="{FF2B5EF4-FFF2-40B4-BE49-F238E27FC236}">
-                <a16:creationId xmlns:a16="http://schemas.microsoft.com/office/drawing/2014/main" id="{A1A7A5E9-AC0A-495D-BB67-E01BC5C04C99}"/>
+                <a16:creationId xmlns:a16="http://schemas.microsoft.com/office/drawing/2014/main" id="{E16B15E5-1F31-4380-B74C-4C86E651ABEE}"/>
               </a:ext>
             </a:extLst>
           </p:cNvPr>
@@ -5908,7 +5908,7 @@
           <p:cNvPr id="8" name="">
             <a:extLst xmlns:a="http://schemas.openxmlformats.org/drawingml/2006/main">
               <a:ext uri="{FF2B5EF4-FFF2-40B4-BE49-F238E27FC236}">
-                <a16:creationId xmlns:a16="http://schemas.microsoft.com/office/drawing/2014/main" id="{E38E2181-7202-467D-99CC-F5AD000B5946}"/>
+                <a16:creationId xmlns:a16="http://schemas.microsoft.com/office/drawing/2014/main" id="{96E2D603-259E-492B-9816-9A3D7EF0C5FB}"/>
               </a:ext>
             </a:extLst>
           </p:cNvPr>
@@ -5965,7 +5965,7 @@
           <p:cNvPr id="9" name="">
             <a:extLst xmlns:a="http://schemas.openxmlformats.org/drawingml/2006/main">
               <a:ext uri="{FF2B5EF4-FFF2-40B4-BE49-F238E27FC236}">
-                <a16:creationId xmlns:a16="http://schemas.microsoft.com/office/drawing/2014/main" id="{4845C59A-185A-45FB-8AAE-D10838E02B0F}"/>
+                <a16:creationId xmlns:a16="http://schemas.microsoft.com/office/drawing/2014/main" id="{29EE5988-F867-471E-8815-A71DFE063FB5}"/>
               </a:ext>
             </a:extLst>
           </p:cNvPr>
@@ -6022,7 +6022,7 @@
           <p:cNvPr id="10" name="">
             <a:extLst xmlns:a="http://schemas.openxmlformats.org/drawingml/2006/main">
               <a:ext uri="{FF2B5EF4-FFF2-40B4-BE49-F238E27FC236}">
-                <a16:creationId xmlns:a16="http://schemas.microsoft.com/office/drawing/2014/main" id="{819EED3A-8AED-4420-974B-DF673381CDC0}"/>
+                <a16:creationId xmlns:a16="http://schemas.microsoft.com/office/drawing/2014/main" id="{6F0BE2F9-ED2E-434C-816D-5F6AE98327C1}"/>
               </a:ext>
             </a:extLst>
           </p:cNvPr>
@@ -6056,7 +6056,7 @@
           <p:cNvPr id="11" name="">
             <a:extLst xmlns:a="http://schemas.openxmlformats.org/drawingml/2006/main">
               <a:ext uri="{FF2B5EF4-FFF2-40B4-BE49-F238E27FC236}">
-                <a16:creationId xmlns:a16="http://schemas.microsoft.com/office/drawing/2014/main" id="{BF9FFF05-45A4-4600-9EC7-8607F8227054}"/>
+                <a16:creationId xmlns:a16="http://schemas.microsoft.com/office/drawing/2014/main" id="{D3054849-5255-4A00-BAB6-63230184EF3D}"/>
               </a:ext>
             </a:extLst>
           </p:cNvPr>
@@ -6088,7 +6088,7 @@
           <p:cNvPr id="12" name="">
             <a:extLst xmlns:a="http://schemas.openxmlformats.org/drawingml/2006/main">
               <a:ext uri="{FF2B5EF4-FFF2-40B4-BE49-F238E27FC236}">
-                <a16:creationId xmlns:a16="http://schemas.microsoft.com/office/drawing/2014/main" id="{13E20904-0CA8-4138-A09F-98244C5E5097}"/>
+                <a16:creationId xmlns:a16="http://schemas.microsoft.com/office/drawing/2014/main" id="{EE5C051E-DE3F-4325-93EC-88DDE53F1CFB}"/>
               </a:ext>
             </a:extLst>
           </p:cNvPr>
@@ -6145,7 +6145,7 @@
           <p:cNvPr id="13" name="">
             <a:extLst xmlns:a="http://schemas.openxmlformats.org/drawingml/2006/main">
               <a:ext uri="{FF2B5EF4-FFF2-40B4-BE49-F238E27FC236}">
-                <a16:creationId xmlns:a16="http://schemas.microsoft.com/office/drawing/2014/main" id="{CBD1592F-18DB-4A4A-921A-9A453059848D}"/>
+                <a16:creationId xmlns:a16="http://schemas.microsoft.com/office/drawing/2014/main" id="{2C98D370-E17E-444C-8B6F-F160A6ABA1F6}"/>
               </a:ext>
             </a:extLst>
           </p:cNvPr>
@@ -6202,7 +6202,7 @@
           <p:cNvPr id="14" name="">
             <a:extLst xmlns:a="http://schemas.openxmlformats.org/drawingml/2006/main">
               <a:ext uri="{FF2B5EF4-FFF2-40B4-BE49-F238E27FC236}">
-                <a16:creationId xmlns:a16="http://schemas.microsoft.com/office/drawing/2014/main" id="{FBE9CFFC-3988-4521-880A-578C60754684}"/>
+                <a16:creationId xmlns:a16="http://schemas.microsoft.com/office/drawing/2014/main" id="{08CF8F18-292A-45C2-96BE-BD4D921AAE5D}"/>
               </a:ext>
             </a:extLst>
           </p:cNvPr>
@@ -6236,7 +6236,7 @@
           <p:cNvPr id="15" name="">
             <a:extLst xmlns:a="http://schemas.openxmlformats.org/drawingml/2006/main">
               <a:ext uri="{FF2B5EF4-FFF2-40B4-BE49-F238E27FC236}">
-                <a16:creationId xmlns:a16="http://schemas.microsoft.com/office/drawing/2014/main" id="{4752E912-12E4-4C04-9A36-0CF8DBBABBDF}"/>
+                <a16:creationId xmlns:a16="http://schemas.microsoft.com/office/drawing/2014/main" id="{A0B531DB-87BA-4AE3-9C50-535881BB0A7B}"/>
               </a:ext>
             </a:extLst>
           </p:cNvPr>
@@ -6268,7 +6268,7 @@
           <p:cNvPr id="16" name="">
             <a:extLst xmlns:a="http://schemas.openxmlformats.org/drawingml/2006/main">
               <a:ext uri="{FF2B5EF4-FFF2-40B4-BE49-F238E27FC236}">
-                <a16:creationId xmlns:a16="http://schemas.microsoft.com/office/drawing/2014/main" id="{9B85161B-F7FB-4D4A-9CE8-755D654498A0}"/>
+                <a16:creationId xmlns:a16="http://schemas.microsoft.com/office/drawing/2014/main" id="{C13FFE6A-4BB8-4E82-9791-08A4D1B69F2C}"/>
               </a:ext>
             </a:extLst>
           </p:cNvPr>
@@ -6325,7 +6325,7 @@
           <p:cNvPr id="17" name="">
             <a:extLst xmlns:a="http://schemas.openxmlformats.org/drawingml/2006/main">
               <a:ext uri="{FF2B5EF4-FFF2-40B4-BE49-F238E27FC236}">
-                <a16:creationId xmlns:a16="http://schemas.microsoft.com/office/drawing/2014/main" id="{A0FBBA5E-18BD-46C8-BDA3-8C4CE996893D}"/>
+                <a16:creationId xmlns:a16="http://schemas.microsoft.com/office/drawing/2014/main" id="{C78AD4E6-6DB3-4949-8957-196A6EF60E63}"/>
               </a:ext>
             </a:extLst>
           </p:cNvPr>
@@ -6382,7 +6382,7 @@
           <p:cNvPr id="18" name="">
             <a:extLst xmlns:a="http://schemas.openxmlformats.org/drawingml/2006/main">
               <a:ext uri="{FF2B5EF4-FFF2-40B4-BE49-F238E27FC236}">
-                <a16:creationId xmlns:a16="http://schemas.microsoft.com/office/drawing/2014/main" id="{F367A782-E5CD-4B23-8362-08B48225059B}"/>
+                <a16:creationId xmlns:a16="http://schemas.microsoft.com/office/drawing/2014/main" id="{5562CDEE-252B-4DB2-AF08-8AF5D7315FA2}"/>
               </a:ext>
             </a:extLst>
           </p:cNvPr>
@@ -6416,7 +6416,7 @@
           <p:cNvPr id="19" name="">
             <a:extLst xmlns:a="http://schemas.openxmlformats.org/drawingml/2006/main">
               <a:ext uri="{FF2B5EF4-FFF2-40B4-BE49-F238E27FC236}">
-                <a16:creationId xmlns:a16="http://schemas.microsoft.com/office/drawing/2014/main" id="{8F442680-B639-4B28-AD16-E3F002F876B7}"/>
+                <a16:creationId xmlns:a16="http://schemas.microsoft.com/office/drawing/2014/main" id="{C5A82E9D-B90C-4F47-9F7B-3433266262C1}"/>
               </a:ext>
             </a:extLst>
           </p:cNvPr>
@@ -6448,7 +6448,7 @@
           <p:cNvPr id="20" name="">
             <a:extLst xmlns:a="http://schemas.openxmlformats.org/drawingml/2006/main">
               <a:ext uri="{FF2B5EF4-FFF2-40B4-BE49-F238E27FC236}">
-                <a16:creationId xmlns:a16="http://schemas.microsoft.com/office/drawing/2014/main" id="{26E0BD90-6FBB-45D9-BC06-236906986F72}"/>
+                <a16:creationId xmlns:a16="http://schemas.microsoft.com/office/drawing/2014/main" id="{6D63C354-386F-469F-B7CA-A3236BD47E22}"/>
               </a:ext>
             </a:extLst>
           </p:cNvPr>
@@ -6505,7 +6505,7 @@
           <p:cNvPr id="21" name="">
             <a:extLst xmlns:a="http://schemas.openxmlformats.org/drawingml/2006/main">
               <a:ext uri="{FF2B5EF4-FFF2-40B4-BE49-F238E27FC236}">
-                <a16:creationId xmlns:a16="http://schemas.microsoft.com/office/drawing/2014/main" id="{F657B6EA-38AB-47D0-B541-BA6228D3437A}"/>
+                <a16:creationId xmlns:a16="http://schemas.microsoft.com/office/drawing/2014/main" id="{6C6E515B-BA3D-499C-BA64-ED516EAF3BF2}"/>
               </a:ext>
             </a:extLst>
           </p:cNvPr>
@@ -6562,7 +6562,7 @@
           <p:cNvPr id="22" name="">
             <a:extLst xmlns:a="http://schemas.openxmlformats.org/drawingml/2006/main">
               <a:ext uri="{FF2B5EF4-FFF2-40B4-BE49-F238E27FC236}">
-                <a16:creationId xmlns:a16="http://schemas.microsoft.com/office/drawing/2014/main" id="{15B7F91B-97AB-4592-93D0-FF9772B7F2D8}"/>
+                <a16:creationId xmlns:a16="http://schemas.microsoft.com/office/drawing/2014/main" id="{7D9E79BA-3F45-4C58-B935-172CAEE171DE}"/>
               </a:ext>
             </a:extLst>
           </p:cNvPr>
@@ -6617,7 +6617,7 @@
     </p:spTree>
     <p:extLst>
       <p:ext uri="{BB962C8B-B14F-4D97-AF65-F5344CB8AC3E}">
-        <p14:creationId xmlns:p14="http://schemas.microsoft.com/office/powerpoint/2010/main" val="1865787005"/>
+        <p14:creationId xmlns:p14="http://schemas.microsoft.com/office/powerpoint/2010/main" val="1815236556"/>
       </p:ext>
     </p:extLst>
   </p:cSld>
@@ -6818,7 +6818,7 @@
           <p:cNvPr id="16" name="">
             <a:extLst xmlns:a="http://schemas.openxmlformats.org/drawingml/2006/main">
               <a:ext uri="{FF2B5EF4-FFF2-40B4-BE49-F238E27FC236}">
-                <a16:creationId xmlns:a16="http://schemas.microsoft.com/office/drawing/2014/main" id="{0B931A9D-F31B-494E-A844-1AE968736A4C}"/>
+                <a16:creationId xmlns:a16="http://schemas.microsoft.com/office/drawing/2014/main" id="{ADCA33C6-E190-43CB-9772-1B82EB0A4254}"/>
               </a:ext>
             </a:extLst>
           </p:cNvPr>
@@ -6850,7 +6850,7 @@
           <p:cNvPr id="2" name="">
             <a:extLst xmlns:a="http://schemas.openxmlformats.org/drawingml/2006/main">
               <a:ext uri="{FF2B5EF4-FFF2-40B4-BE49-F238E27FC236}">
-                <a16:creationId xmlns:a16="http://schemas.microsoft.com/office/drawing/2014/main" id="{46D70A8E-B938-45E9-BF29-50E7274F81D8}"/>
+                <a16:creationId xmlns:a16="http://schemas.microsoft.com/office/drawing/2014/main" id="{D2AE17FA-8167-4AB9-BBB4-5CC80F23A6CF}"/>
               </a:ext>
             </a:extLst>
           </p:cNvPr>
@@ -6907,7 +6907,7 @@
           <p:cNvPr id="3" name="">
             <a:extLst xmlns:a="http://schemas.openxmlformats.org/drawingml/2006/main">
               <a:ext uri="{FF2B5EF4-FFF2-40B4-BE49-F238E27FC236}">
-                <a16:creationId xmlns:a16="http://schemas.microsoft.com/office/drawing/2014/main" id="{EE3CAE05-D948-4C3B-869A-B1A1C23D9583}"/>
+                <a16:creationId xmlns:a16="http://schemas.microsoft.com/office/drawing/2014/main" id="{650705EB-2858-4858-8A1E-B85C02CBEC9D}"/>
               </a:ext>
             </a:extLst>
           </p:cNvPr>
@@ -6939,7 +6939,7 @@
           <p:cNvPr id="4" name="">
             <a:extLst xmlns:a="http://schemas.openxmlformats.org/drawingml/2006/main">
               <a:ext uri="{FF2B5EF4-FFF2-40B4-BE49-F238E27FC236}">
-                <a16:creationId xmlns:a16="http://schemas.microsoft.com/office/drawing/2014/main" id="{DE9CA934-2EE1-4E6C-A876-F6801C15DCFE}"/>
+                <a16:creationId xmlns:a16="http://schemas.microsoft.com/office/drawing/2014/main" id="{D3480797-ACA6-4499-B11F-D64707DAA593}"/>
               </a:ext>
             </a:extLst>
           </p:cNvPr>
@@ -6996,7 +6996,7 @@
           <p:cNvPr id="5" name="">
             <a:extLst xmlns:a="http://schemas.openxmlformats.org/drawingml/2006/main">
               <a:ext uri="{FF2B5EF4-FFF2-40B4-BE49-F238E27FC236}">
-                <a16:creationId xmlns:a16="http://schemas.microsoft.com/office/drawing/2014/main" id="{8E03DE5C-1A7B-448C-8F68-813D36D15222}"/>
+                <a16:creationId xmlns:a16="http://schemas.microsoft.com/office/drawing/2014/main" id="{846DC002-CDC9-42EB-A0EF-4C726137363F}"/>
               </a:ext>
             </a:extLst>
           </p:cNvPr>
@@ -7053,7 +7053,7 @@
           <p:cNvPr id="6" name="">
             <a:extLst xmlns:a="http://schemas.openxmlformats.org/drawingml/2006/main">
               <a:ext uri="{FF2B5EF4-FFF2-40B4-BE49-F238E27FC236}">
-                <a16:creationId xmlns:a16="http://schemas.microsoft.com/office/drawing/2014/main" id="{38DBBA26-492D-465C-85F6-E513991B396E}"/>
+                <a16:creationId xmlns:a16="http://schemas.microsoft.com/office/drawing/2014/main" id="{C86DD957-2034-49BD-AA92-FE72D4F57DA0}"/>
               </a:ext>
             </a:extLst>
           </p:cNvPr>
@@ -7110,7 +7110,7 @@
           <p:cNvPr id="7" name="">
             <a:extLst xmlns:a="http://schemas.openxmlformats.org/drawingml/2006/main">
               <a:ext uri="{FF2B5EF4-FFF2-40B4-BE49-F238E27FC236}">
-                <a16:creationId xmlns:a16="http://schemas.microsoft.com/office/drawing/2014/main" id="{AF81739B-1253-43A3-86C1-60146FE231B9}"/>
+                <a16:creationId xmlns:a16="http://schemas.microsoft.com/office/drawing/2014/main" id="{47EBD73E-0A3B-4593-AC40-61BE0E888A8F}"/>
               </a:ext>
             </a:extLst>
           </p:cNvPr>
@@ -7142,7 +7142,7 @@
           <p:cNvPr id="8" name="">
             <a:extLst xmlns:a="http://schemas.openxmlformats.org/drawingml/2006/main">
               <a:ext uri="{FF2B5EF4-FFF2-40B4-BE49-F238E27FC236}">
-                <a16:creationId xmlns:a16="http://schemas.microsoft.com/office/drawing/2014/main" id="{D9F3C9E5-E934-493F-BE94-81CB71FB552D}"/>
+                <a16:creationId xmlns:a16="http://schemas.microsoft.com/office/drawing/2014/main" id="{23356A23-B3C5-4123-9D0E-8F69C4F1D489}"/>
               </a:ext>
             </a:extLst>
           </p:cNvPr>
@@ -7199,7 +7199,7 @@
           <p:cNvPr id="9" name="">
             <a:extLst xmlns:a="http://schemas.openxmlformats.org/drawingml/2006/main">
               <a:ext uri="{FF2B5EF4-FFF2-40B4-BE49-F238E27FC236}">
-                <a16:creationId xmlns:a16="http://schemas.microsoft.com/office/drawing/2014/main" id="{EC7C7696-7066-439B-AB47-5B1EA2534CA9}"/>
+                <a16:creationId xmlns:a16="http://schemas.microsoft.com/office/drawing/2014/main" id="{28E96E41-DD72-46CD-8BAA-66BD28115355}"/>
               </a:ext>
             </a:extLst>
           </p:cNvPr>
@@ -7256,7 +7256,7 @@
           <p:cNvPr id="10" name="">
             <a:extLst xmlns:a="http://schemas.openxmlformats.org/drawingml/2006/main">
               <a:ext uri="{FF2B5EF4-FFF2-40B4-BE49-F238E27FC236}">
-                <a16:creationId xmlns:a16="http://schemas.microsoft.com/office/drawing/2014/main" id="{3DA20CCA-0563-41E9-8E52-50E3733A7249}"/>
+                <a16:creationId xmlns:a16="http://schemas.microsoft.com/office/drawing/2014/main" id="{AECB5E19-5792-41E2-8B48-91663261835E}"/>
               </a:ext>
             </a:extLst>
           </p:cNvPr>
@@ -7313,7 +7313,7 @@
           <p:cNvPr id="11" name="">
             <a:extLst xmlns:a="http://schemas.openxmlformats.org/drawingml/2006/main">
               <a:ext uri="{FF2B5EF4-FFF2-40B4-BE49-F238E27FC236}">
-                <a16:creationId xmlns:a16="http://schemas.microsoft.com/office/drawing/2014/main" id="{C895E1B2-6D77-4C5B-AA7D-5544F91F8447}"/>
+                <a16:creationId xmlns:a16="http://schemas.microsoft.com/office/drawing/2014/main" id="{4284FF35-D148-4F0D-9EC9-CFAE1B789520}"/>
               </a:ext>
             </a:extLst>
           </p:cNvPr>
@@ -7345,7 +7345,7 @@
           <p:cNvPr id="12" name="">
             <a:extLst xmlns:a="http://schemas.openxmlformats.org/drawingml/2006/main">
               <a:ext uri="{FF2B5EF4-FFF2-40B4-BE49-F238E27FC236}">
-                <a16:creationId xmlns:a16="http://schemas.microsoft.com/office/drawing/2014/main" id="{F7FDD622-90AD-4FAE-AAB5-90C0763E9336}"/>
+                <a16:creationId xmlns:a16="http://schemas.microsoft.com/office/drawing/2014/main" id="{785A4667-6351-4CB6-AB29-C39778867942}"/>
               </a:ext>
             </a:extLst>
           </p:cNvPr>
@@ -7402,7 +7402,7 @@
           <p:cNvPr id="13" name="">
             <a:extLst xmlns:a="http://schemas.openxmlformats.org/drawingml/2006/main">
               <a:ext uri="{FF2B5EF4-FFF2-40B4-BE49-F238E27FC236}">
-                <a16:creationId xmlns:a16="http://schemas.microsoft.com/office/drawing/2014/main" id="{D36D8ED0-AAAF-41F0-977E-1F1F9549248D}"/>
+                <a16:creationId xmlns:a16="http://schemas.microsoft.com/office/drawing/2014/main" id="{5B635DF7-37F5-402D-A7C7-090D26672936}"/>
               </a:ext>
             </a:extLst>
           </p:cNvPr>
@@ -7459,7 +7459,7 @@
           <p:cNvPr id="14" name="">
             <a:extLst xmlns:a="http://schemas.openxmlformats.org/drawingml/2006/main">
               <a:ext uri="{FF2B5EF4-FFF2-40B4-BE49-F238E27FC236}">
-                <a16:creationId xmlns:a16="http://schemas.microsoft.com/office/drawing/2014/main" id="{51372479-8F6D-40BC-9146-05E6D7754048}"/>
+                <a16:creationId xmlns:a16="http://schemas.microsoft.com/office/drawing/2014/main" id="{2B22A413-6E2B-488A-BCC4-BA6186D1D64D}"/>
               </a:ext>
             </a:extLst>
           </p:cNvPr>
@@ -7516,7 +7516,7 @@
           <p:cNvPr id="15" name="">
             <a:extLst xmlns:a="http://schemas.openxmlformats.org/drawingml/2006/main">
               <a:ext uri="{FF2B5EF4-FFF2-40B4-BE49-F238E27FC236}">
-                <a16:creationId xmlns:a16="http://schemas.microsoft.com/office/drawing/2014/main" id="{F9A74C1D-59E1-4ADA-A84A-BE725BD45EF8}"/>
+                <a16:creationId xmlns:a16="http://schemas.microsoft.com/office/drawing/2014/main" id="{D6CE720A-00AA-40AD-8E4E-575C110379FE}"/>
               </a:ext>
             </a:extLst>
           </p:cNvPr>
@@ -7571,7 +7571,7 @@
     </p:spTree>
     <p:extLst>
       <p:ext uri="{BB962C8B-B14F-4D97-AF65-F5344CB8AC3E}">
-        <p14:creationId xmlns:p14="http://schemas.microsoft.com/office/powerpoint/2010/main" val="613011539"/>
+        <p14:creationId xmlns:p14="http://schemas.microsoft.com/office/powerpoint/2010/main" val="1161820688"/>
       </p:ext>
     </p:extLst>
   </p:cSld>
@@ -7772,7 +7772,7 @@
           <p:cNvPr id="23" name="">
             <a:extLst xmlns:a="http://schemas.openxmlformats.org/drawingml/2006/main">
               <a:ext uri="{FF2B5EF4-FFF2-40B4-BE49-F238E27FC236}">
-                <a16:creationId xmlns:a16="http://schemas.microsoft.com/office/drawing/2014/main" id="{B9CA240F-32D3-4777-8A58-CF02E11CF724}"/>
+                <a16:creationId xmlns:a16="http://schemas.microsoft.com/office/drawing/2014/main" id="{5327AD70-D480-4C22-BCF7-57B87210C1B9}"/>
               </a:ext>
             </a:extLst>
           </p:cNvPr>
@@ -7804,7 +7804,7 @@
           <p:cNvPr id="2" name="">
             <a:extLst xmlns:a="http://schemas.openxmlformats.org/drawingml/2006/main">
               <a:ext uri="{FF2B5EF4-FFF2-40B4-BE49-F238E27FC236}">
-                <a16:creationId xmlns:a16="http://schemas.microsoft.com/office/drawing/2014/main" id="{117E320D-8E94-4F33-92C3-800EDF875F59}"/>
+                <a16:creationId xmlns:a16="http://schemas.microsoft.com/office/drawing/2014/main" id="{3BC41882-E587-4A94-B55E-FB396B29BF06}"/>
               </a:ext>
             </a:extLst>
           </p:cNvPr>
@@ -7861,7 +7861,7 @@
           <p:cNvPr id="3" name="">
             <a:extLst xmlns:a="http://schemas.openxmlformats.org/drawingml/2006/main">
               <a:ext uri="{FF2B5EF4-FFF2-40B4-BE49-F238E27FC236}">
-                <a16:creationId xmlns:a16="http://schemas.microsoft.com/office/drawing/2014/main" id="{B18F88B1-64FF-44AD-B834-B4C4A1D9DE18}"/>
+                <a16:creationId xmlns:a16="http://schemas.microsoft.com/office/drawing/2014/main" id="{04598526-EFF8-4446-89E6-95381CDDB058}"/>
               </a:ext>
             </a:extLst>
           </p:cNvPr>
@@ -7893,7 +7893,7 @@
           <p:cNvPr id="4" name="">
             <a:extLst xmlns:a="http://schemas.openxmlformats.org/drawingml/2006/main">
               <a:ext uri="{FF2B5EF4-FFF2-40B4-BE49-F238E27FC236}">
-                <a16:creationId xmlns:a16="http://schemas.microsoft.com/office/drawing/2014/main" id="{172DF136-65B6-4FDD-8B1D-BA1C47EB9DF7}"/>
+                <a16:creationId xmlns:a16="http://schemas.microsoft.com/office/drawing/2014/main" id="{32A18E14-1647-4AEA-9136-72BDBADD7C8E}"/>
               </a:ext>
             </a:extLst>
           </p:cNvPr>
@@ -7950,7 +7950,7 @@
           <p:cNvPr id="5" name="">
             <a:extLst xmlns:a="http://schemas.openxmlformats.org/drawingml/2006/main">
               <a:ext uri="{FF2B5EF4-FFF2-40B4-BE49-F238E27FC236}">
-                <a16:creationId xmlns:a16="http://schemas.microsoft.com/office/drawing/2014/main" id="{E56493F4-4019-4E31-BF47-A59810462652}"/>
+                <a16:creationId xmlns:a16="http://schemas.microsoft.com/office/drawing/2014/main" id="{4DC84FC4-519E-4670-B97B-7DC5D6AC4F59}"/>
               </a:ext>
             </a:extLst>
           </p:cNvPr>
@@ -8007,7 +8007,7 @@
           <p:cNvPr id="6" name="">
             <a:extLst xmlns:a="http://schemas.openxmlformats.org/drawingml/2006/main">
               <a:ext uri="{FF2B5EF4-FFF2-40B4-BE49-F238E27FC236}">
-                <a16:creationId xmlns:a16="http://schemas.microsoft.com/office/drawing/2014/main" id="{CCF0F980-AD96-4B4B-9282-1AAC312AA3D2}"/>
+                <a16:creationId xmlns:a16="http://schemas.microsoft.com/office/drawing/2014/main" id="{58E81178-2152-4E64-B13B-BC9BC91D9773}"/>
               </a:ext>
             </a:extLst>
           </p:cNvPr>
@@ -8064,7 +8064,7 @@
           <p:cNvPr id="7" name="">
             <a:extLst xmlns:a="http://schemas.openxmlformats.org/drawingml/2006/main">
               <a:ext uri="{FF2B5EF4-FFF2-40B4-BE49-F238E27FC236}">
-                <a16:creationId xmlns:a16="http://schemas.microsoft.com/office/drawing/2014/main" id="{485557BB-7FA0-4AC7-8921-5F3FFE6EDAE6}"/>
+                <a16:creationId xmlns:a16="http://schemas.microsoft.com/office/drawing/2014/main" id="{3471FAB3-A97B-44F3-B781-174533B6261F}"/>
               </a:ext>
             </a:extLst>
           </p:cNvPr>
@@ -8096,7 +8096,7 @@
           <p:cNvPr id="8" name="">
             <a:extLst xmlns:a="http://schemas.openxmlformats.org/drawingml/2006/main">
               <a:ext uri="{FF2B5EF4-FFF2-40B4-BE49-F238E27FC236}">
-                <a16:creationId xmlns:a16="http://schemas.microsoft.com/office/drawing/2014/main" id="{1BE773D5-A1DB-438E-AC08-20B41C899C56}"/>
+                <a16:creationId xmlns:a16="http://schemas.microsoft.com/office/drawing/2014/main" id="{277EEF86-7BC5-4F57-BC50-6B4BB3A3E372}"/>
               </a:ext>
             </a:extLst>
           </p:cNvPr>
@@ -8153,7 +8153,7 @@
           <p:cNvPr id="9" name="">
             <a:extLst xmlns:a="http://schemas.openxmlformats.org/drawingml/2006/main">
               <a:ext uri="{FF2B5EF4-FFF2-40B4-BE49-F238E27FC236}">
-                <a16:creationId xmlns:a16="http://schemas.microsoft.com/office/drawing/2014/main" id="{5B1EAAAC-5550-49E9-8C95-D79BA4ED8364}"/>
+                <a16:creationId xmlns:a16="http://schemas.microsoft.com/office/drawing/2014/main" id="{52C90ACE-E1FC-47C4-8A50-DC95018336CC}"/>
               </a:ext>
             </a:extLst>
           </p:cNvPr>
@@ -8210,19 +8210,19 @@
           <p:cNvPr id="10" name="">
             <a:extLst xmlns:a="http://schemas.openxmlformats.org/drawingml/2006/main">
               <a:ext uri="{FF2B5EF4-FFF2-40B4-BE49-F238E27FC236}">
-                <a16:creationId xmlns:a16="http://schemas.microsoft.com/office/drawing/2014/main" id="{35CB3980-F035-44D3-A8B2-19984D16E3C5}"/>
-              </a:ext>
-            </a:extLst>
-          </p:cNvPr>
-          <p:cNvSpPr>
-            <a:spLocks xmlns:a="http://schemas.openxmlformats.org/drawingml/2006/main" noGrp="1"/>
-          </p:cNvSpPr>
-          <p:nvPr/>
-        </p:nvSpPr>
-        <p:spPr>
-          <a:xfrm xmlns:a="http://schemas.openxmlformats.org/drawingml/2006/main">
-            <a:off x="914400" y="1257300"/>
-            <a:ext cx="10363200" cy="781050"/>
+                <a16:creationId xmlns:a16="http://schemas.microsoft.com/office/drawing/2014/main" id="{D27A8996-3DD2-45E1-B170-6F94D51B5C37}"/>
+              </a:ext>
+            </a:extLst>
+          </p:cNvPr>
+          <p:cNvSpPr>
+            <a:spLocks xmlns:a="http://schemas.openxmlformats.org/drawingml/2006/main" noGrp="1"/>
+          </p:cNvSpPr>
+          <p:nvPr/>
+        </p:nvSpPr>
+        <p:spPr>
+          <a:xfrm xmlns:a="http://schemas.openxmlformats.org/drawingml/2006/main">
+            <a:off x="857250" y="1219200"/>
+            <a:ext cx="10477500" cy="742950"/>
           </a:xfrm>
           <a:prstGeom xmlns:a="http://schemas.openxmlformats.org/drawingml/2006/main" prst="rect">
             <a:avLst/>
@@ -8239,7 +8239,7 @@
           <a:lstStyle xmlns:a="http://schemas.openxmlformats.org/drawingml/2006/main"/>
           <a:p xmlns:a="http://schemas.openxmlformats.org/drawingml/2006/main">
             <a:pPr algn="ctr">
-              <a:defRPr sz="2175" b="1">
+              <a:defRPr sz="2100" b="1">
                 <a:solidFill>
                   <a:srgbClr val="17253A"/>
                 </a:solidFill>
@@ -8249,7 +8249,7 @@
               </a:defRPr>
             </a:pPr>
             <a:r>
-              <a:rPr sz="2175" b="1">
+              <a:rPr sz="2100" b="1">
                 <a:solidFill>
                   <a:srgbClr val="17253A"/>
                 </a:solidFill>
@@ -8267,28 +8267,30 @@
           <p:cNvPr id="11" name="">
             <a:extLst xmlns:a="http://schemas.openxmlformats.org/drawingml/2006/main">
               <a:ext uri="{FF2B5EF4-FFF2-40B4-BE49-F238E27FC236}">
-                <a16:creationId xmlns:a16="http://schemas.microsoft.com/office/drawing/2014/main" id="{32BC7DF6-25D8-4798-821F-822033A88340}"/>
-              </a:ext>
-            </a:extLst>
-          </p:cNvPr>
-          <p:cNvSpPr>
-            <a:spLocks xmlns:a="http://schemas.openxmlformats.org/drawingml/2006/main" noGrp="1"/>
-          </p:cNvSpPr>
-          <p:nvPr/>
-        </p:nvSpPr>
-        <p:spPr>
-          <a:xfrm xmlns:a="http://schemas.openxmlformats.org/drawingml/2006/main">
-            <a:off x="1000125" y="2247900"/>
-            <a:ext cx="476250" cy="476250"/>
-          </a:xfrm>
-          <a:prstGeom xmlns:a="http://schemas.openxmlformats.org/drawingml/2006/main" prst="ellipse">
+                <a16:creationId xmlns:a16="http://schemas.microsoft.com/office/drawing/2014/main" id="{ACEF6028-964E-4973-B7B6-612BA3BBF84F}"/>
+              </a:ext>
+            </a:extLst>
+          </p:cNvPr>
+          <p:cNvSpPr>
+            <a:spLocks xmlns:a="http://schemas.openxmlformats.org/drawingml/2006/main" noGrp="1"/>
+          </p:cNvSpPr>
+          <p:nvPr/>
+        </p:nvSpPr>
+        <p:spPr>
+          <a:xfrm xmlns:a="http://schemas.openxmlformats.org/drawingml/2006/main">
+            <a:off x="971550" y="2124075"/>
+            <a:ext cx="38100" cy="3524250"/>
+          </a:xfrm>
+          <a:prstGeom xmlns:a="http://schemas.openxmlformats.org/drawingml/2006/main" prst="rect">
             <a:avLst/>
           </a:prstGeom>
           <a:solidFill xmlns:a="http://schemas.openxmlformats.org/drawingml/2006/main">
-            <a:srgbClr val="18324A"/>
+            <a:srgbClr val="2C6E73"/>
           </a:solidFill>
           <a:ln xmlns:a="http://schemas.openxmlformats.org/drawingml/2006/main" w="0">
-            <a:noFill/>
+            <a:solidFill>
+              <a:srgbClr val="2C6E73"/>
+            </a:solidFill>
           </a:ln>
         </p:spPr>
       </p:sp>
@@ -8297,19 +8299,19 @@
           <p:cNvPr id="12" name="">
             <a:extLst xmlns:a="http://schemas.openxmlformats.org/drawingml/2006/main">
               <a:ext uri="{FF2B5EF4-FFF2-40B4-BE49-F238E27FC236}">
-                <a16:creationId xmlns:a16="http://schemas.microsoft.com/office/drawing/2014/main" id="{DDB34B8C-AD91-4D27-9419-BA45C477FDD1}"/>
-              </a:ext>
-            </a:extLst>
-          </p:cNvPr>
-          <p:cNvSpPr>
-            <a:spLocks xmlns:a="http://schemas.openxmlformats.org/drawingml/2006/main" noGrp="1"/>
-          </p:cNvSpPr>
-          <p:nvPr/>
-        </p:nvSpPr>
-        <p:spPr>
-          <a:xfrm xmlns:a="http://schemas.openxmlformats.org/drawingml/2006/main">
-            <a:off x="1000125" y="2276475"/>
-            <a:ext cx="476250" cy="419100"/>
+                <a16:creationId xmlns:a16="http://schemas.microsoft.com/office/drawing/2014/main" id="{185CF7BD-F8E5-4EAB-B02F-0CA74549D108}"/>
+              </a:ext>
+            </a:extLst>
+          </p:cNvPr>
+          <p:cNvSpPr>
+            <a:spLocks xmlns:a="http://schemas.openxmlformats.org/drawingml/2006/main" noGrp="1"/>
+          </p:cNvSpPr>
+          <p:nvPr/>
+        </p:nvSpPr>
+        <p:spPr>
+          <a:xfrm xmlns:a="http://schemas.openxmlformats.org/drawingml/2006/main">
+            <a:off x="1162050" y="2200275"/>
+            <a:ext cx="400050" cy="400050"/>
           </a:xfrm>
           <a:prstGeom xmlns:a="http://schemas.openxmlformats.org/drawingml/2006/main" prst="rect">
             <a:avLst/>
@@ -8326,9 +8328,9 @@
           <a:lstStyle xmlns:a="http://schemas.openxmlformats.org/drawingml/2006/main"/>
           <a:p xmlns:a="http://schemas.openxmlformats.org/drawingml/2006/main">
             <a:pPr algn="ctr">
-              <a:defRPr sz="1350" b="1">
-                <a:solidFill>
-                  <a:srgbClr val="FFFFFF"/>
+              <a:defRPr sz="1125" b="1">
+                <a:solidFill>
+                  <a:srgbClr val="2C6E73"/>
                 </a:solidFill>
                 <a:latin typeface="Arial"/>
                 <a:ea typeface="Arial"/>
@@ -8336,9 +8338,9 @@
               </a:defRPr>
             </a:pPr>
             <a:r>
-              <a:rPr sz="1350" b="1">
-                <a:solidFill>
-                  <a:srgbClr val="FFFFFF"/>
+              <a:rPr sz="1125" b="1">
+                <a:solidFill>
+                  <a:srgbClr val="2C6E73"/>
                 </a:solidFill>
                 <a:latin typeface="Arial"/>
                 <a:ea typeface="Arial"/>
@@ -8354,19 +8356,19 @@
           <p:cNvPr id="13" name="">
             <a:extLst xmlns:a="http://schemas.openxmlformats.org/drawingml/2006/main">
               <a:ext uri="{FF2B5EF4-FFF2-40B4-BE49-F238E27FC236}">
-                <a16:creationId xmlns:a16="http://schemas.microsoft.com/office/drawing/2014/main" id="{18A13A72-9300-4F6E-A918-419192FCFAFF}"/>
-              </a:ext>
-            </a:extLst>
-          </p:cNvPr>
-          <p:cNvSpPr>
-            <a:spLocks xmlns:a="http://schemas.openxmlformats.org/drawingml/2006/main" noGrp="1"/>
-          </p:cNvSpPr>
-          <p:nvPr/>
-        </p:nvSpPr>
-        <p:spPr>
-          <a:xfrm xmlns:a="http://schemas.openxmlformats.org/drawingml/2006/main">
-            <a:off x="1714500" y="2181225"/>
-            <a:ext cx="9429750" cy="609600"/>
+                <a16:creationId xmlns:a16="http://schemas.microsoft.com/office/drawing/2014/main" id="{A0BBB336-3054-4B2F-9F7E-9A3D783E1275}"/>
+              </a:ext>
+            </a:extLst>
+          </p:cNvPr>
+          <p:cNvSpPr>
+            <a:spLocks xmlns:a="http://schemas.openxmlformats.org/drawingml/2006/main" noGrp="1"/>
+          </p:cNvSpPr>
+          <p:nvPr/>
+        </p:nvSpPr>
+        <p:spPr>
+          <a:xfrm xmlns:a="http://schemas.openxmlformats.org/drawingml/2006/main">
+            <a:off x="1714500" y="2114550"/>
+            <a:ext cx="9525000" cy="809625"/>
           </a:xfrm>
           <a:prstGeom xmlns:a="http://schemas.openxmlformats.org/drawingml/2006/main" prst="rect">
             <a:avLst/>
@@ -8383,7 +8385,7 @@
           <a:lstStyle xmlns:a="http://schemas.openxmlformats.org/drawingml/2006/main"/>
           <a:p xmlns:a="http://schemas.openxmlformats.org/drawingml/2006/main">
             <a:pPr algn="l">
-              <a:defRPr sz="1500" b="0">
+              <a:defRPr sz="1725" b="0">
                 <a:solidFill>
                   <a:srgbClr val="17253A"/>
                 </a:solidFill>
@@ -8393,7 +8395,7 @@
               </a:defRPr>
             </a:pPr>
             <a:r>
-              <a:rPr sz="1500" b="0">
+              <a:rPr sz="1725" b="0">
                 <a:solidFill>
                   <a:srgbClr val="17253A"/>
                 </a:solidFill>
@@ -8401,7 +8403,7 @@
                 <a:ea typeface="Arial"/>
                 <a:cs typeface="Arial"/>
               </a:rPr>
-              <a:t>Identify the structure: Identify the multiplicative scale or total number of ratio parts.</a:t>
+              <a:t>Share £420 in ratio 3 : 4</a:t>
             </a:r>
           </a:p>
         </p:txBody>
@@ -8411,28 +8413,30 @@
           <p:cNvPr id="14" name="">
             <a:extLst xmlns:a="http://schemas.openxmlformats.org/drawingml/2006/main">
               <a:ext uri="{FF2B5EF4-FFF2-40B4-BE49-F238E27FC236}">
-                <a16:creationId xmlns:a16="http://schemas.microsoft.com/office/drawing/2014/main" id="{6C72072D-5E12-4A49-BCF8-10D000CCC024}"/>
-              </a:ext>
-            </a:extLst>
-          </p:cNvPr>
-          <p:cNvSpPr>
-            <a:spLocks xmlns:a="http://schemas.openxmlformats.org/drawingml/2006/main" noGrp="1"/>
-          </p:cNvSpPr>
-          <p:nvPr/>
-        </p:nvSpPr>
-        <p:spPr>
-          <a:xfrm xmlns:a="http://schemas.openxmlformats.org/drawingml/2006/main">
-            <a:off x="1000125" y="2990850"/>
-            <a:ext cx="476250" cy="476250"/>
-          </a:xfrm>
-          <a:prstGeom xmlns:a="http://schemas.openxmlformats.org/drawingml/2006/main" prst="ellipse">
+                <a16:creationId xmlns:a16="http://schemas.microsoft.com/office/drawing/2014/main" id="{B319ACF0-623E-491F-ADE2-6366092DFF0E}"/>
+              </a:ext>
+            </a:extLst>
+          </p:cNvPr>
+          <p:cNvSpPr>
+            <a:spLocks xmlns:a="http://schemas.openxmlformats.org/drawingml/2006/main" noGrp="1"/>
+          </p:cNvSpPr>
+          <p:nvPr/>
+        </p:nvSpPr>
+        <p:spPr>
+          <a:xfrm xmlns:a="http://schemas.openxmlformats.org/drawingml/2006/main">
+            <a:off x="1714500" y="2943225"/>
+            <a:ext cx="9334500" cy="9525"/>
+          </a:xfrm>
+          <a:prstGeom xmlns:a="http://schemas.openxmlformats.org/drawingml/2006/main" prst="rect">
             <a:avLst/>
           </a:prstGeom>
           <a:solidFill xmlns:a="http://schemas.openxmlformats.org/drawingml/2006/main">
-            <a:srgbClr val="2C6E73"/>
+            <a:srgbClr val="D9E0E6"/>
           </a:solidFill>
           <a:ln xmlns:a="http://schemas.openxmlformats.org/drawingml/2006/main" w="0">
-            <a:noFill/>
+            <a:solidFill>
+              <a:srgbClr val="D9E0E6"/>
+            </a:solidFill>
           </a:ln>
         </p:spPr>
       </p:sp>
@@ -8441,19 +8445,19 @@
           <p:cNvPr id="15" name="">
             <a:extLst xmlns:a="http://schemas.openxmlformats.org/drawingml/2006/main">
               <a:ext uri="{FF2B5EF4-FFF2-40B4-BE49-F238E27FC236}">
-                <a16:creationId xmlns:a16="http://schemas.microsoft.com/office/drawing/2014/main" id="{3A8B12B1-CFF5-445C-B641-BED5A18357F0}"/>
-              </a:ext>
-            </a:extLst>
-          </p:cNvPr>
-          <p:cNvSpPr>
-            <a:spLocks xmlns:a="http://schemas.openxmlformats.org/drawingml/2006/main" noGrp="1"/>
-          </p:cNvSpPr>
-          <p:nvPr/>
-        </p:nvSpPr>
-        <p:spPr>
-          <a:xfrm xmlns:a="http://schemas.openxmlformats.org/drawingml/2006/main">
-            <a:off x="1000125" y="3019425"/>
-            <a:ext cx="476250" cy="419100"/>
+                <a16:creationId xmlns:a16="http://schemas.microsoft.com/office/drawing/2014/main" id="{24F695AE-C114-4816-AA73-25628E7C39FB}"/>
+              </a:ext>
+            </a:extLst>
+          </p:cNvPr>
+          <p:cNvSpPr>
+            <a:spLocks xmlns:a="http://schemas.openxmlformats.org/drawingml/2006/main" noGrp="1"/>
+          </p:cNvSpPr>
+          <p:nvPr/>
+        </p:nvSpPr>
+        <p:spPr>
+          <a:xfrm xmlns:a="http://schemas.openxmlformats.org/drawingml/2006/main">
+            <a:off x="1162050" y="3076575"/>
+            <a:ext cx="400050" cy="400050"/>
           </a:xfrm>
           <a:prstGeom xmlns:a="http://schemas.openxmlformats.org/drawingml/2006/main" prst="rect">
             <a:avLst/>
@@ -8470,9 +8474,9 @@
           <a:lstStyle xmlns:a="http://schemas.openxmlformats.org/drawingml/2006/main"/>
           <a:p xmlns:a="http://schemas.openxmlformats.org/drawingml/2006/main">
             <a:pPr algn="ctr">
-              <a:defRPr sz="1350" b="1">
-                <a:solidFill>
-                  <a:srgbClr val="FFFFFF"/>
+              <a:defRPr sz="1125" b="1">
+                <a:solidFill>
+                  <a:srgbClr val="2C6E73"/>
                 </a:solidFill>
                 <a:latin typeface="Arial"/>
                 <a:ea typeface="Arial"/>
@@ -8480,9 +8484,9 @@
               </a:defRPr>
             </a:pPr>
             <a:r>
-              <a:rPr sz="1350" b="1">
-                <a:solidFill>
-                  <a:srgbClr val="FFFFFF"/>
+              <a:rPr sz="1125" b="1">
+                <a:solidFill>
+                  <a:srgbClr val="2C6E73"/>
                 </a:solidFill>
                 <a:latin typeface="Arial"/>
                 <a:ea typeface="Arial"/>
@@ -8498,19 +8502,19 @@
           <p:cNvPr id="16" name="">
             <a:extLst xmlns:a="http://schemas.openxmlformats.org/drawingml/2006/main">
               <a:ext uri="{FF2B5EF4-FFF2-40B4-BE49-F238E27FC236}">
-                <a16:creationId xmlns:a16="http://schemas.microsoft.com/office/drawing/2014/main" id="{2365E0CA-7070-4C63-BFD4-24410341566E}"/>
-              </a:ext>
-            </a:extLst>
-          </p:cNvPr>
-          <p:cNvSpPr>
-            <a:spLocks xmlns:a="http://schemas.openxmlformats.org/drawingml/2006/main" noGrp="1"/>
-          </p:cNvSpPr>
-          <p:nvPr/>
-        </p:nvSpPr>
-        <p:spPr>
-          <a:xfrm xmlns:a="http://schemas.openxmlformats.org/drawingml/2006/main">
-            <a:off x="1714500" y="2924175"/>
-            <a:ext cx="9429750" cy="609600"/>
+                <a16:creationId xmlns:a16="http://schemas.microsoft.com/office/drawing/2014/main" id="{B240DF9F-6884-46DE-A6B2-A53117D5BA94}"/>
+              </a:ext>
+            </a:extLst>
+          </p:cNvPr>
+          <p:cNvSpPr>
+            <a:spLocks xmlns:a="http://schemas.openxmlformats.org/drawingml/2006/main" noGrp="1"/>
+          </p:cNvSpPr>
+          <p:nvPr/>
+        </p:nvSpPr>
+        <p:spPr>
+          <a:xfrm xmlns:a="http://schemas.openxmlformats.org/drawingml/2006/main">
+            <a:off x="1714500" y="2990850"/>
+            <a:ext cx="9525000" cy="809625"/>
           </a:xfrm>
           <a:prstGeom xmlns:a="http://schemas.openxmlformats.org/drawingml/2006/main" prst="rect">
             <a:avLst/>
@@ -8527,7 +8531,7 @@
           <a:lstStyle xmlns:a="http://schemas.openxmlformats.org/drawingml/2006/main"/>
           <a:p xmlns:a="http://schemas.openxmlformats.org/drawingml/2006/main">
             <a:pPr algn="l">
-              <a:defRPr sz="1500" b="0">
+              <a:defRPr sz="1725" b="0">
                 <a:solidFill>
                   <a:srgbClr val="17253A"/>
                 </a:solidFill>
@@ -8537,7 +8541,7 @@
               </a:defRPr>
             </a:pPr>
             <a:r>
-              <a:rPr sz="1500" b="0">
+              <a:rPr sz="1725" b="0">
                 <a:solidFill>
                   <a:srgbClr val="17253A"/>
                 </a:solidFill>
@@ -8545,7 +8549,7 @@
                 <a:ea typeface="Arial"/>
                 <a:cs typeface="Arial"/>
               </a:rPr>
-              <a:t>Set up the method: Apply the factor consistently or find the value of one part.</a:t>
+              <a:t>Total parts = 3 + 4 = 7</a:t>
             </a:r>
           </a:p>
         </p:txBody>
@@ -8555,28 +8559,30 @@
           <p:cNvPr id="17" name="">
             <a:extLst xmlns:a="http://schemas.openxmlformats.org/drawingml/2006/main">
               <a:ext uri="{FF2B5EF4-FFF2-40B4-BE49-F238E27FC236}">
-                <a16:creationId xmlns:a16="http://schemas.microsoft.com/office/drawing/2014/main" id="{9391EE0F-5D71-4AEB-914D-A5CE2A60A83F}"/>
-              </a:ext>
-            </a:extLst>
-          </p:cNvPr>
-          <p:cNvSpPr>
-            <a:spLocks xmlns:a="http://schemas.openxmlformats.org/drawingml/2006/main" noGrp="1"/>
-          </p:cNvSpPr>
-          <p:nvPr/>
-        </p:nvSpPr>
-        <p:spPr>
-          <a:xfrm xmlns:a="http://schemas.openxmlformats.org/drawingml/2006/main">
-            <a:off x="1000125" y="3733800"/>
-            <a:ext cx="476250" cy="476250"/>
-          </a:xfrm>
-          <a:prstGeom xmlns:a="http://schemas.openxmlformats.org/drawingml/2006/main" prst="ellipse">
+                <a16:creationId xmlns:a16="http://schemas.microsoft.com/office/drawing/2014/main" id="{E9BB0F81-5B2C-46BE-99BD-765BF948EBF7}"/>
+              </a:ext>
+            </a:extLst>
+          </p:cNvPr>
+          <p:cNvSpPr>
+            <a:spLocks xmlns:a="http://schemas.openxmlformats.org/drawingml/2006/main" noGrp="1"/>
+          </p:cNvSpPr>
+          <p:nvPr/>
+        </p:nvSpPr>
+        <p:spPr>
+          <a:xfrm xmlns:a="http://schemas.openxmlformats.org/drawingml/2006/main">
+            <a:off x="1714500" y="3819525"/>
+            <a:ext cx="9334500" cy="9525"/>
+          </a:xfrm>
+          <a:prstGeom xmlns:a="http://schemas.openxmlformats.org/drawingml/2006/main" prst="rect">
             <a:avLst/>
           </a:prstGeom>
           <a:solidFill xmlns:a="http://schemas.openxmlformats.org/drawingml/2006/main">
-            <a:srgbClr val="2C6E73"/>
+            <a:srgbClr val="D9E0E6"/>
           </a:solidFill>
           <a:ln xmlns:a="http://schemas.openxmlformats.org/drawingml/2006/main" w="0">
-            <a:noFill/>
+            <a:solidFill>
+              <a:srgbClr val="D9E0E6"/>
+            </a:solidFill>
           </a:ln>
         </p:spPr>
       </p:sp>
@@ -8585,19 +8591,19 @@
           <p:cNvPr id="18" name="">
             <a:extLst xmlns:a="http://schemas.openxmlformats.org/drawingml/2006/main">
               <a:ext uri="{FF2B5EF4-FFF2-40B4-BE49-F238E27FC236}">
-                <a16:creationId xmlns:a16="http://schemas.microsoft.com/office/drawing/2014/main" id="{11BB1C4E-AC8F-42FC-AB26-79A8909BA0F2}"/>
-              </a:ext>
-            </a:extLst>
-          </p:cNvPr>
-          <p:cNvSpPr>
-            <a:spLocks xmlns:a="http://schemas.openxmlformats.org/drawingml/2006/main" noGrp="1"/>
-          </p:cNvSpPr>
-          <p:nvPr/>
-        </p:nvSpPr>
-        <p:spPr>
-          <a:xfrm xmlns:a="http://schemas.openxmlformats.org/drawingml/2006/main">
-            <a:off x="1000125" y="3762375"/>
-            <a:ext cx="476250" cy="419100"/>
+                <a16:creationId xmlns:a16="http://schemas.microsoft.com/office/drawing/2014/main" id="{1A145C79-CBE6-43CC-BA45-4F567FA01303}"/>
+              </a:ext>
+            </a:extLst>
+          </p:cNvPr>
+          <p:cNvSpPr>
+            <a:spLocks xmlns:a="http://schemas.openxmlformats.org/drawingml/2006/main" noGrp="1"/>
+          </p:cNvSpPr>
+          <p:nvPr/>
+        </p:nvSpPr>
+        <p:spPr>
+          <a:xfrm xmlns:a="http://schemas.openxmlformats.org/drawingml/2006/main">
+            <a:off x="1162050" y="3952875"/>
+            <a:ext cx="400050" cy="400050"/>
           </a:xfrm>
           <a:prstGeom xmlns:a="http://schemas.openxmlformats.org/drawingml/2006/main" prst="rect">
             <a:avLst/>
@@ -8614,9 +8620,9 @@
           <a:lstStyle xmlns:a="http://schemas.openxmlformats.org/drawingml/2006/main"/>
           <a:p xmlns:a="http://schemas.openxmlformats.org/drawingml/2006/main">
             <a:pPr algn="ctr">
-              <a:defRPr sz="1350" b="1">
-                <a:solidFill>
-                  <a:srgbClr val="FFFFFF"/>
+              <a:defRPr sz="1125" b="1">
+                <a:solidFill>
+                  <a:srgbClr val="2C6E73"/>
                 </a:solidFill>
                 <a:latin typeface="Arial"/>
                 <a:ea typeface="Arial"/>
@@ -8624,9 +8630,9 @@
               </a:defRPr>
             </a:pPr>
             <a:r>
-              <a:rPr sz="1350" b="1">
-                <a:solidFill>
-                  <a:srgbClr val="FFFFFF"/>
+              <a:rPr sz="1125" b="1">
+                <a:solidFill>
+                  <a:srgbClr val="2C6E73"/>
                 </a:solidFill>
                 <a:latin typeface="Arial"/>
                 <a:ea typeface="Arial"/>
@@ -8642,19 +8648,19 @@
           <p:cNvPr id="19" name="">
             <a:extLst xmlns:a="http://schemas.openxmlformats.org/drawingml/2006/main">
               <a:ext uri="{FF2B5EF4-FFF2-40B4-BE49-F238E27FC236}">
-                <a16:creationId xmlns:a16="http://schemas.microsoft.com/office/drawing/2014/main" id="{3D4789A6-86FF-40F5-84E3-5011EB330BF0}"/>
-              </a:ext>
-            </a:extLst>
-          </p:cNvPr>
-          <p:cNvSpPr>
-            <a:spLocks xmlns:a="http://schemas.openxmlformats.org/drawingml/2006/main" noGrp="1"/>
-          </p:cNvSpPr>
-          <p:nvPr/>
-        </p:nvSpPr>
-        <p:spPr>
-          <a:xfrm xmlns:a="http://schemas.openxmlformats.org/drawingml/2006/main">
-            <a:off x="1714500" y="3667125"/>
-            <a:ext cx="9429750" cy="609600"/>
+                <a16:creationId xmlns:a16="http://schemas.microsoft.com/office/drawing/2014/main" id="{9CA0CA2B-351E-4E59-96AF-86AD89685DE4}"/>
+              </a:ext>
+            </a:extLst>
+          </p:cNvPr>
+          <p:cNvSpPr>
+            <a:spLocks xmlns:a="http://schemas.openxmlformats.org/drawingml/2006/main" noGrp="1"/>
+          </p:cNvSpPr>
+          <p:nvPr/>
+        </p:nvSpPr>
+        <p:spPr>
+          <a:xfrm xmlns:a="http://schemas.openxmlformats.org/drawingml/2006/main">
+            <a:off x="1714500" y="3867150"/>
+            <a:ext cx="9525000" cy="809625"/>
           </a:xfrm>
           <a:prstGeom xmlns:a="http://schemas.openxmlformats.org/drawingml/2006/main" prst="rect">
             <a:avLst/>
@@ -8671,7 +8677,7 @@
           <a:lstStyle xmlns:a="http://schemas.openxmlformats.org/drawingml/2006/main"/>
           <a:p xmlns:a="http://schemas.openxmlformats.org/drawingml/2006/main">
             <a:pPr algn="l">
-              <a:defRPr sz="1500" b="0">
+              <a:defRPr sz="1725" b="0">
                 <a:solidFill>
                   <a:srgbClr val="17253A"/>
                 </a:solidFill>
@@ -8681,7 +8687,7 @@
               </a:defRPr>
             </a:pPr>
             <a:r>
-              <a:rPr sz="1500" b="0">
+              <a:rPr sz="1725" b="0">
                 <a:solidFill>
                   <a:srgbClr val="17253A"/>
                 </a:solidFill>
@@ -8689,7 +8695,7 @@
                 <a:ea typeface="Arial"/>
                 <a:cs typeface="Arial"/>
               </a:rPr>
-              <a:t>Complete the calculation: £180 and £240.</a:t>
+              <a:t>One part = £420 ÷ 7 = £60</a:t>
             </a:r>
           </a:p>
         </p:txBody>
@@ -8699,28 +8705,30 @@
           <p:cNvPr id="20" name="">
             <a:extLst xmlns:a="http://schemas.openxmlformats.org/drawingml/2006/main">
               <a:ext uri="{FF2B5EF4-FFF2-40B4-BE49-F238E27FC236}">
-                <a16:creationId xmlns:a16="http://schemas.microsoft.com/office/drawing/2014/main" id="{B7B39DBF-3714-447E-8A60-ACC8EFCB7D22}"/>
-              </a:ext>
-            </a:extLst>
-          </p:cNvPr>
-          <p:cNvSpPr>
-            <a:spLocks xmlns:a="http://schemas.openxmlformats.org/drawingml/2006/main" noGrp="1"/>
-          </p:cNvSpPr>
-          <p:nvPr/>
-        </p:nvSpPr>
-        <p:spPr>
-          <a:xfrm xmlns:a="http://schemas.openxmlformats.org/drawingml/2006/main">
-            <a:off x="1000125" y="4476750"/>
-            <a:ext cx="476250" cy="476250"/>
-          </a:xfrm>
-          <a:prstGeom xmlns:a="http://schemas.openxmlformats.org/drawingml/2006/main" prst="ellipse">
+                <a16:creationId xmlns:a16="http://schemas.microsoft.com/office/drawing/2014/main" id="{913778F2-D124-4082-B13E-265C55E6E62E}"/>
+              </a:ext>
+            </a:extLst>
+          </p:cNvPr>
+          <p:cNvSpPr>
+            <a:spLocks xmlns:a="http://schemas.openxmlformats.org/drawingml/2006/main" noGrp="1"/>
+          </p:cNvSpPr>
+          <p:nvPr/>
+        </p:nvSpPr>
+        <p:spPr>
+          <a:xfrm xmlns:a="http://schemas.openxmlformats.org/drawingml/2006/main">
+            <a:off x="1714500" y="4695825"/>
+            <a:ext cx="9334500" cy="9525"/>
+          </a:xfrm>
+          <a:prstGeom xmlns:a="http://schemas.openxmlformats.org/drawingml/2006/main" prst="rect">
             <a:avLst/>
           </a:prstGeom>
           <a:solidFill xmlns:a="http://schemas.openxmlformats.org/drawingml/2006/main">
-            <a:srgbClr val="2C6E73"/>
+            <a:srgbClr val="D9E0E6"/>
           </a:solidFill>
           <a:ln xmlns:a="http://schemas.openxmlformats.org/drawingml/2006/main" w="0">
-            <a:noFill/>
+            <a:solidFill>
+              <a:srgbClr val="D9E0E6"/>
+            </a:solidFill>
           </a:ln>
         </p:spPr>
       </p:sp>
@@ -8729,19 +8737,19 @@
           <p:cNvPr id="21" name="">
             <a:extLst xmlns:a="http://schemas.openxmlformats.org/drawingml/2006/main">
               <a:ext uri="{FF2B5EF4-FFF2-40B4-BE49-F238E27FC236}">
-                <a16:creationId xmlns:a16="http://schemas.microsoft.com/office/drawing/2014/main" id="{91EEFFD6-D4F4-405E-91FE-09D3B59E3575}"/>
-              </a:ext>
-            </a:extLst>
-          </p:cNvPr>
-          <p:cNvSpPr>
-            <a:spLocks xmlns:a="http://schemas.openxmlformats.org/drawingml/2006/main" noGrp="1"/>
-          </p:cNvSpPr>
-          <p:nvPr/>
-        </p:nvSpPr>
-        <p:spPr>
-          <a:xfrm xmlns:a="http://schemas.openxmlformats.org/drawingml/2006/main">
-            <a:off x="1000125" y="4505325"/>
-            <a:ext cx="476250" cy="419100"/>
+                <a16:creationId xmlns:a16="http://schemas.microsoft.com/office/drawing/2014/main" id="{E226610D-A826-4F9A-B23D-5CA67D6FA51D}"/>
+              </a:ext>
+            </a:extLst>
+          </p:cNvPr>
+          <p:cNvSpPr>
+            <a:spLocks xmlns:a="http://schemas.openxmlformats.org/drawingml/2006/main" noGrp="1"/>
+          </p:cNvSpPr>
+          <p:nvPr/>
+        </p:nvSpPr>
+        <p:spPr>
+          <a:xfrm xmlns:a="http://schemas.openxmlformats.org/drawingml/2006/main">
+            <a:off x="1162050" y="4829175"/>
+            <a:ext cx="400050" cy="400050"/>
           </a:xfrm>
           <a:prstGeom xmlns:a="http://schemas.openxmlformats.org/drawingml/2006/main" prst="rect">
             <a:avLst/>
@@ -8758,9 +8766,9 @@
           <a:lstStyle xmlns:a="http://schemas.openxmlformats.org/drawingml/2006/main"/>
           <a:p xmlns:a="http://schemas.openxmlformats.org/drawingml/2006/main">
             <a:pPr algn="ctr">
-              <a:defRPr sz="1350" b="1">
-                <a:solidFill>
-                  <a:srgbClr val="FFFFFF"/>
+              <a:defRPr sz="1125" b="1">
+                <a:solidFill>
+                  <a:srgbClr val="2F785D"/>
                 </a:solidFill>
                 <a:latin typeface="Arial"/>
                 <a:ea typeface="Arial"/>
@@ -8768,9 +8776,9 @@
               </a:defRPr>
             </a:pPr>
             <a:r>
-              <a:rPr sz="1350" b="1">
-                <a:solidFill>
-                  <a:srgbClr val="FFFFFF"/>
+              <a:rPr sz="1125" b="1">
+                <a:solidFill>
+                  <a:srgbClr val="2F785D"/>
                 </a:solidFill>
                 <a:latin typeface="Arial"/>
                 <a:ea typeface="Arial"/>
@@ -8786,19 +8794,19 @@
           <p:cNvPr id="22" name="">
             <a:extLst xmlns:a="http://schemas.openxmlformats.org/drawingml/2006/main">
               <a:ext uri="{FF2B5EF4-FFF2-40B4-BE49-F238E27FC236}">
-                <a16:creationId xmlns:a16="http://schemas.microsoft.com/office/drawing/2014/main" id="{1F16F93D-40DB-4A4F-9B36-B5E01A2D419D}"/>
-              </a:ext>
-            </a:extLst>
-          </p:cNvPr>
-          <p:cNvSpPr>
-            <a:spLocks xmlns:a="http://schemas.openxmlformats.org/drawingml/2006/main" noGrp="1"/>
-          </p:cNvSpPr>
-          <p:nvPr/>
-        </p:nvSpPr>
-        <p:spPr>
-          <a:xfrm xmlns:a="http://schemas.openxmlformats.org/drawingml/2006/main">
-            <a:off x="1714500" y="4410075"/>
-            <a:ext cx="9429750" cy="609600"/>
+                <a16:creationId xmlns:a16="http://schemas.microsoft.com/office/drawing/2014/main" id="{96FA80E5-BD73-4B5F-A98D-253C0CB28744}"/>
+              </a:ext>
+            </a:extLst>
+          </p:cNvPr>
+          <p:cNvSpPr>
+            <a:spLocks xmlns:a="http://schemas.openxmlformats.org/drawingml/2006/main" noGrp="1"/>
+          </p:cNvSpPr>
+          <p:nvPr/>
+        </p:nvSpPr>
+        <p:spPr>
+          <a:xfrm xmlns:a="http://schemas.openxmlformats.org/drawingml/2006/main">
+            <a:off x="1714500" y="4743450"/>
+            <a:ext cx="9525000" cy="809625"/>
           </a:xfrm>
           <a:prstGeom xmlns:a="http://schemas.openxmlformats.org/drawingml/2006/main" prst="rect">
             <a:avLst/>
@@ -8815,7 +8823,7 @@
           <a:lstStyle xmlns:a="http://schemas.openxmlformats.org/drawingml/2006/main"/>
           <a:p xmlns:a="http://schemas.openxmlformats.org/drawingml/2006/main">
             <a:pPr algn="l">
-              <a:defRPr sz="1500" b="1">
+              <a:defRPr sz="1725" b="1">
                 <a:solidFill>
                   <a:srgbClr val="2F785D"/>
                 </a:solidFill>
@@ -8825,7 +8833,7 @@
               </a:defRPr>
             </a:pPr>
             <a:r>
-              <a:rPr sz="1500" b="1">
+              <a:rPr sz="1725" b="1">
                 <a:solidFill>
                   <a:srgbClr val="2F785D"/>
                 </a:solidFill>
@@ -8833,7 +8841,7 @@
                 <a:ea typeface="Arial"/>
                 <a:cs typeface="Arial"/>
               </a:rPr>
-              <a:t>Check the result: Recombine and check the total or corresponding measure.</a:t>
+              <a:t>3 parts = £180     4 parts = £240</a:t>
             </a:r>
           </a:p>
         </p:txBody>
@@ -8841,7 +8849,7 @@
     </p:spTree>
     <p:extLst>
       <p:ext uri="{BB962C8B-B14F-4D97-AF65-F5344CB8AC3E}">
-        <p14:creationId xmlns:p14="http://schemas.microsoft.com/office/powerpoint/2010/main" val="650757082"/>
+        <p14:creationId xmlns:p14="http://schemas.microsoft.com/office/powerpoint/2010/main" val="1990416062"/>
       </p:ext>
     </p:extLst>
   </p:cSld>
@@ -9134,7 +9142,7 @@
           <p:cNvPr id="15" name="">
             <a:extLst xmlns:a="http://schemas.openxmlformats.org/drawingml/2006/main">
               <a:ext uri="{FF2B5EF4-FFF2-40B4-BE49-F238E27FC236}">
-                <a16:creationId xmlns:a16="http://schemas.microsoft.com/office/drawing/2014/main" id="{FD6AFE88-9DD2-4BDC-A265-DE703DBBEF79}"/>
+                <a16:creationId xmlns:a16="http://schemas.microsoft.com/office/drawing/2014/main" id="{AD56E1F1-7F7B-4AA4-9322-C8419C70C41F}"/>
               </a:ext>
             </a:extLst>
           </p:cNvPr>
@@ -9166,7 +9174,7 @@
           <p:cNvPr id="2" name="">
             <a:extLst xmlns:a="http://schemas.openxmlformats.org/drawingml/2006/main">
               <a:ext uri="{FF2B5EF4-FFF2-40B4-BE49-F238E27FC236}">
-                <a16:creationId xmlns:a16="http://schemas.microsoft.com/office/drawing/2014/main" id="{F24027B2-76EA-4FCB-B34C-D34CEE79EBA9}"/>
+                <a16:creationId xmlns:a16="http://schemas.microsoft.com/office/drawing/2014/main" id="{B81DA81E-0D92-4ACD-B42F-EC26EF5EAD0B}"/>
               </a:ext>
             </a:extLst>
           </p:cNvPr>
@@ -9223,7 +9231,7 @@
           <p:cNvPr id="3" name="">
             <a:extLst xmlns:a="http://schemas.openxmlformats.org/drawingml/2006/main">
               <a:ext uri="{FF2B5EF4-FFF2-40B4-BE49-F238E27FC236}">
-                <a16:creationId xmlns:a16="http://schemas.microsoft.com/office/drawing/2014/main" id="{2FF0CB64-A2FA-454B-9435-1BDB89E652A5}"/>
+                <a16:creationId xmlns:a16="http://schemas.microsoft.com/office/drawing/2014/main" id="{FD16A312-13DC-42CE-9CD0-4A8C60C9A8C8}"/>
               </a:ext>
             </a:extLst>
           </p:cNvPr>
@@ -9255,7 +9263,7 @@
           <p:cNvPr id="4" name="">
             <a:extLst xmlns:a="http://schemas.openxmlformats.org/drawingml/2006/main">
               <a:ext uri="{FF2B5EF4-FFF2-40B4-BE49-F238E27FC236}">
-                <a16:creationId xmlns:a16="http://schemas.microsoft.com/office/drawing/2014/main" id="{EF1FED5E-A971-4F52-B3B7-8E8EBE270FB2}"/>
+                <a16:creationId xmlns:a16="http://schemas.microsoft.com/office/drawing/2014/main" id="{547F4E36-BFE3-48B9-BD9E-196F541C5FDC}"/>
               </a:ext>
             </a:extLst>
           </p:cNvPr>
@@ -9312,7 +9320,7 @@
           <p:cNvPr id="5" name="">
             <a:extLst xmlns:a="http://schemas.openxmlformats.org/drawingml/2006/main">
               <a:ext uri="{FF2B5EF4-FFF2-40B4-BE49-F238E27FC236}">
-                <a16:creationId xmlns:a16="http://schemas.microsoft.com/office/drawing/2014/main" id="{92A06F9A-11FC-4A22-97ED-BF7FFFFD7BCD}"/>
+                <a16:creationId xmlns:a16="http://schemas.microsoft.com/office/drawing/2014/main" id="{D7E4623D-9AD5-4DD7-AD0A-9F6C8410D3E6}"/>
               </a:ext>
             </a:extLst>
           </p:cNvPr>
@@ -9369,7 +9377,7 @@
           <p:cNvPr id="6" name="">
             <a:extLst xmlns:a="http://schemas.openxmlformats.org/drawingml/2006/main">
               <a:ext uri="{FF2B5EF4-FFF2-40B4-BE49-F238E27FC236}">
-                <a16:creationId xmlns:a16="http://schemas.microsoft.com/office/drawing/2014/main" id="{2FC7B942-8823-479A-9A12-C057ED744489}"/>
+                <a16:creationId xmlns:a16="http://schemas.microsoft.com/office/drawing/2014/main" id="{193F1281-4DED-46E5-88B3-BC09C236EB0D}"/>
               </a:ext>
             </a:extLst>
           </p:cNvPr>
@@ -9426,7 +9434,7 @@
           <p:cNvPr id="7" name="">
             <a:extLst xmlns:a="http://schemas.openxmlformats.org/drawingml/2006/main">
               <a:ext uri="{FF2B5EF4-FFF2-40B4-BE49-F238E27FC236}">
-                <a16:creationId xmlns:a16="http://schemas.microsoft.com/office/drawing/2014/main" id="{8E7F864F-F082-4DEC-B9F3-AF425185F6C5}"/>
+                <a16:creationId xmlns:a16="http://schemas.microsoft.com/office/drawing/2014/main" id="{B6B8E2C6-F565-406C-86AF-42CB01913C4C}"/>
               </a:ext>
             </a:extLst>
           </p:cNvPr>
@@ -9458,7 +9466,7 @@
           <p:cNvPr id="8" name="">
             <a:extLst xmlns:a="http://schemas.openxmlformats.org/drawingml/2006/main">
               <a:ext uri="{FF2B5EF4-FFF2-40B4-BE49-F238E27FC236}">
-                <a16:creationId xmlns:a16="http://schemas.microsoft.com/office/drawing/2014/main" id="{51C857E9-C751-4A17-A2CF-CC0FAC1B18D0}"/>
+                <a16:creationId xmlns:a16="http://schemas.microsoft.com/office/drawing/2014/main" id="{E59EB4A2-0BA3-41A6-B27C-937CAA4EA60E}"/>
               </a:ext>
             </a:extLst>
           </p:cNvPr>
@@ -9515,7 +9523,7 @@
           <p:cNvPr id="9" name="">
             <a:extLst xmlns:a="http://schemas.openxmlformats.org/drawingml/2006/main">
               <a:ext uri="{FF2B5EF4-FFF2-40B4-BE49-F238E27FC236}">
-                <a16:creationId xmlns:a16="http://schemas.microsoft.com/office/drawing/2014/main" id="{4AF5AED2-FA54-4B9D-9108-A4A75E34FA71}"/>
+                <a16:creationId xmlns:a16="http://schemas.microsoft.com/office/drawing/2014/main" id="{FB6F30CE-6C09-4DE3-A83F-E1127A984609}"/>
               </a:ext>
             </a:extLst>
           </p:cNvPr>
@@ -9572,7 +9580,7 @@
           <p:cNvPr id="10" name="">
             <a:extLst xmlns:a="http://schemas.openxmlformats.org/drawingml/2006/main">
               <a:ext uri="{FF2B5EF4-FFF2-40B4-BE49-F238E27FC236}">
-                <a16:creationId xmlns:a16="http://schemas.microsoft.com/office/drawing/2014/main" id="{88353875-3306-4C0E-BDCD-0C206D757C3C}"/>
+                <a16:creationId xmlns:a16="http://schemas.microsoft.com/office/drawing/2014/main" id="{398FBF20-66ED-473A-A392-AABC4AE1BF95}"/>
               </a:ext>
             </a:extLst>
           </p:cNvPr>
@@ -9629,7 +9637,7 @@
           <p:cNvPr id="11" name="">
             <a:extLst xmlns:a="http://schemas.openxmlformats.org/drawingml/2006/main">
               <a:ext uri="{FF2B5EF4-FFF2-40B4-BE49-F238E27FC236}">
-                <a16:creationId xmlns:a16="http://schemas.microsoft.com/office/drawing/2014/main" id="{CECCFD82-296B-49F0-BC1D-5BF8EBB04CA3}"/>
+                <a16:creationId xmlns:a16="http://schemas.microsoft.com/office/drawing/2014/main" id="{AF36B810-69B6-4B04-83B0-FE1E35B61D77}"/>
               </a:ext>
             </a:extLst>
           </p:cNvPr>
@@ -9686,7 +9694,7 @@
           <p:cNvPr id="12" name="">
             <a:extLst xmlns:a="http://schemas.openxmlformats.org/drawingml/2006/main">
               <a:ext uri="{FF2B5EF4-FFF2-40B4-BE49-F238E27FC236}">
-                <a16:creationId xmlns:a16="http://schemas.microsoft.com/office/drawing/2014/main" id="{58EAC686-54C3-4179-AD79-CBA44E72D706}"/>
+                <a16:creationId xmlns:a16="http://schemas.microsoft.com/office/drawing/2014/main" id="{072B3654-FCF5-4CEE-AE26-48E900FDC3AE}"/>
               </a:ext>
             </a:extLst>
           </p:cNvPr>
@@ -9718,7 +9726,7 @@
           <p:cNvPr id="13" name="">
             <a:extLst xmlns:a="http://schemas.openxmlformats.org/drawingml/2006/main">
               <a:ext uri="{FF2B5EF4-FFF2-40B4-BE49-F238E27FC236}">
-                <a16:creationId xmlns:a16="http://schemas.microsoft.com/office/drawing/2014/main" id="{672D299E-C69E-41DC-AE87-18AE96F03044}"/>
+                <a16:creationId xmlns:a16="http://schemas.microsoft.com/office/drawing/2014/main" id="{CA4E0BC1-5998-4E47-9CCD-F006667CD033}"/>
               </a:ext>
             </a:extLst>
           </p:cNvPr>
@@ -9775,7 +9783,7 @@
           <p:cNvPr id="14" name="">
             <a:extLst xmlns:a="http://schemas.openxmlformats.org/drawingml/2006/main">
               <a:ext uri="{FF2B5EF4-FFF2-40B4-BE49-F238E27FC236}">
-                <a16:creationId xmlns:a16="http://schemas.microsoft.com/office/drawing/2014/main" id="{CCF5077A-A0C5-45AF-B67C-B88769B57B1C}"/>
+                <a16:creationId xmlns:a16="http://schemas.microsoft.com/office/drawing/2014/main" id="{573586F8-3071-43C3-B9DC-C9F0BFC0AE72}"/>
               </a:ext>
             </a:extLst>
           </p:cNvPr>
@@ -9830,7 +9838,7 @@
     </p:spTree>
     <p:extLst>
       <p:ext uri="{BB962C8B-B14F-4D97-AF65-F5344CB8AC3E}">
-        <p14:creationId xmlns:p14="http://schemas.microsoft.com/office/powerpoint/2010/main" val="108761352"/>
+        <p14:creationId xmlns:p14="http://schemas.microsoft.com/office/powerpoint/2010/main" val="131670888"/>
       </p:ext>
     </p:extLst>
   </p:cSld>
@@ -10031,7 +10039,7 @@
           <p:cNvPr id="16" name="">
             <a:extLst xmlns:a="http://schemas.openxmlformats.org/drawingml/2006/main">
               <a:ext uri="{FF2B5EF4-FFF2-40B4-BE49-F238E27FC236}">
-                <a16:creationId xmlns:a16="http://schemas.microsoft.com/office/drawing/2014/main" id="{04605045-A8A5-4F2E-931B-DE2CFFF2EDD9}"/>
+                <a16:creationId xmlns:a16="http://schemas.microsoft.com/office/drawing/2014/main" id="{6E0ABA54-EA39-47A1-BFAE-96B178830B83}"/>
               </a:ext>
             </a:extLst>
           </p:cNvPr>
@@ -10063,7 +10071,7 @@
           <p:cNvPr id="2" name="">
             <a:extLst xmlns:a="http://schemas.openxmlformats.org/drawingml/2006/main">
               <a:ext uri="{FF2B5EF4-FFF2-40B4-BE49-F238E27FC236}">
-                <a16:creationId xmlns:a16="http://schemas.microsoft.com/office/drawing/2014/main" id="{18F527E0-3004-46C2-BC61-C9D8B0720AEB}"/>
+                <a16:creationId xmlns:a16="http://schemas.microsoft.com/office/drawing/2014/main" id="{7581E28E-D159-4FCA-A619-8914C31EF192}"/>
               </a:ext>
             </a:extLst>
           </p:cNvPr>
@@ -10120,7 +10128,7 @@
           <p:cNvPr id="3" name="">
             <a:extLst xmlns:a="http://schemas.openxmlformats.org/drawingml/2006/main">
               <a:ext uri="{FF2B5EF4-FFF2-40B4-BE49-F238E27FC236}">
-                <a16:creationId xmlns:a16="http://schemas.microsoft.com/office/drawing/2014/main" id="{6DE21CE7-12E8-458B-96F9-6C882DAFEA92}"/>
+                <a16:creationId xmlns:a16="http://schemas.microsoft.com/office/drawing/2014/main" id="{A5856E87-33BF-4453-BB52-836A645EC6D4}"/>
               </a:ext>
             </a:extLst>
           </p:cNvPr>
@@ -10152,7 +10160,7 @@
           <p:cNvPr id="4" name="">
             <a:extLst xmlns:a="http://schemas.openxmlformats.org/drawingml/2006/main">
               <a:ext uri="{FF2B5EF4-FFF2-40B4-BE49-F238E27FC236}">
-                <a16:creationId xmlns:a16="http://schemas.microsoft.com/office/drawing/2014/main" id="{8124C7AB-F7C9-4F47-846E-3F49069E58E0}"/>
+                <a16:creationId xmlns:a16="http://schemas.microsoft.com/office/drawing/2014/main" id="{EE7F8D3C-9B1D-4133-A805-48998F5410C3}"/>
               </a:ext>
             </a:extLst>
           </p:cNvPr>
@@ -10209,7 +10217,7 @@
           <p:cNvPr id="5" name="">
             <a:extLst xmlns:a="http://schemas.openxmlformats.org/drawingml/2006/main">
               <a:ext uri="{FF2B5EF4-FFF2-40B4-BE49-F238E27FC236}">
-                <a16:creationId xmlns:a16="http://schemas.microsoft.com/office/drawing/2014/main" id="{FE279380-66BE-42A1-A0E1-B0542B00CEEA}"/>
+                <a16:creationId xmlns:a16="http://schemas.microsoft.com/office/drawing/2014/main" id="{0240C21D-26AF-4ED0-95A9-772DA370DDC5}"/>
               </a:ext>
             </a:extLst>
           </p:cNvPr>
@@ -10266,7 +10274,7 @@
           <p:cNvPr id="6" name="">
             <a:extLst xmlns:a="http://schemas.openxmlformats.org/drawingml/2006/main">
               <a:ext uri="{FF2B5EF4-FFF2-40B4-BE49-F238E27FC236}">
-                <a16:creationId xmlns:a16="http://schemas.microsoft.com/office/drawing/2014/main" id="{EE780E7F-2306-4893-91FE-AB006844F0D6}"/>
+                <a16:creationId xmlns:a16="http://schemas.microsoft.com/office/drawing/2014/main" id="{0DA0B9FF-D908-48B9-934B-FD7C9A91AB10}"/>
               </a:ext>
             </a:extLst>
           </p:cNvPr>
@@ -10323,7 +10331,7 @@
           <p:cNvPr id="7" name="">
             <a:extLst xmlns:a="http://schemas.openxmlformats.org/drawingml/2006/main">
               <a:ext uri="{FF2B5EF4-FFF2-40B4-BE49-F238E27FC236}">
-                <a16:creationId xmlns:a16="http://schemas.microsoft.com/office/drawing/2014/main" id="{9A68FE55-A1B1-4DA5-8F03-EBAB85FE139E}"/>
+                <a16:creationId xmlns:a16="http://schemas.microsoft.com/office/drawing/2014/main" id="{0F5FF495-FF66-4357-8048-175A04B72A7D}"/>
               </a:ext>
             </a:extLst>
           </p:cNvPr>
@@ -10355,7 +10363,7 @@
           <p:cNvPr id="8" name="">
             <a:extLst xmlns:a="http://schemas.openxmlformats.org/drawingml/2006/main">
               <a:ext uri="{FF2B5EF4-FFF2-40B4-BE49-F238E27FC236}">
-                <a16:creationId xmlns:a16="http://schemas.microsoft.com/office/drawing/2014/main" id="{B763876E-2789-41AE-AF08-7141354EA03D}"/>
+                <a16:creationId xmlns:a16="http://schemas.microsoft.com/office/drawing/2014/main" id="{21B9C5A8-CB1D-4E62-8097-8793B9167831}"/>
               </a:ext>
             </a:extLst>
           </p:cNvPr>
@@ -10412,7 +10420,7 @@
           <p:cNvPr id="9" name="">
             <a:extLst xmlns:a="http://schemas.openxmlformats.org/drawingml/2006/main">
               <a:ext uri="{FF2B5EF4-FFF2-40B4-BE49-F238E27FC236}">
-                <a16:creationId xmlns:a16="http://schemas.microsoft.com/office/drawing/2014/main" id="{458AC11D-9454-40E3-B024-B9B7C7669591}"/>
+                <a16:creationId xmlns:a16="http://schemas.microsoft.com/office/drawing/2014/main" id="{6CCCC3A5-B443-4673-9F83-2AE1EC726179}"/>
               </a:ext>
             </a:extLst>
           </p:cNvPr>
@@ -10469,7 +10477,7 @@
           <p:cNvPr id="10" name="">
             <a:extLst xmlns:a="http://schemas.openxmlformats.org/drawingml/2006/main">
               <a:ext uri="{FF2B5EF4-FFF2-40B4-BE49-F238E27FC236}">
-                <a16:creationId xmlns:a16="http://schemas.microsoft.com/office/drawing/2014/main" id="{0B86EA70-9E89-40D9-B7E5-9E0A165D5E4A}"/>
+                <a16:creationId xmlns:a16="http://schemas.microsoft.com/office/drawing/2014/main" id="{7FF9A1B1-F804-4482-834E-C7585AA5B54C}"/>
               </a:ext>
             </a:extLst>
           </p:cNvPr>
@@ -10526,7 +10534,7 @@
           <p:cNvPr id="11" name="">
             <a:extLst xmlns:a="http://schemas.openxmlformats.org/drawingml/2006/main">
               <a:ext uri="{FF2B5EF4-FFF2-40B4-BE49-F238E27FC236}">
-                <a16:creationId xmlns:a16="http://schemas.microsoft.com/office/drawing/2014/main" id="{C4C08B1D-BFE7-480F-B6FC-77D42724D67A}"/>
+                <a16:creationId xmlns:a16="http://schemas.microsoft.com/office/drawing/2014/main" id="{7FFFEF8E-A2FE-4C4E-87C9-553A5D7346F8}"/>
               </a:ext>
             </a:extLst>
           </p:cNvPr>
@@ -10583,7 +10591,7 @@
           <p:cNvPr id="12" name="">
             <a:extLst xmlns:a="http://schemas.openxmlformats.org/drawingml/2006/main">
               <a:ext uri="{FF2B5EF4-FFF2-40B4-BE49-F238E27FC236}">
-                <a16:creationId xmlns:a16="http://schemas.microsoft.com/office/drawing/2014/main" id="{A1AB0DD1-FCA0-4C62-8BAD-DCDD61B1F705}"/>
+                <a16:creationId xmlns:a16="http://schemas.microsoft.com/office/drawing/2014/main" id="{8A43F7F8-F011-42D9-95E2-5BF3D932D88E}"/>
               </a:ext>
             </a:extLst>
           </p:cNvPr>
@@ -10640,7 +10648,7 @@
           <p:cNvPr id="13" name="">
             <a:extLst xmlns:a="http://schemas.openxmlformats.org/drawingml/2006/main">
               <a:ext uri="{FF2B5EF4-FFF2-40B4-BE49-F238E27FC236}">
-                <a16:creationId xmlns:a16="http://schemas.microsoft.com/office/drawing/2014/main" id="{F49D8584-AB23-4B52-B0D7-8530E534E537}"/>
+                <a16:creationId xmlns:a16="http://schemas.microsoft.com/office/drawing/2014/main" id="{8F2193C5-F0C1-4405-98AB-CE9C9DB081F8}"/>
               </a:ext>
             </a:extLst>
           </p:cNvPr>
@@ -10697,7 +10705,7 @@
           <p:cNvPr id="14" name="">
             <a:extLst xmlns:a="http://schemas.openxmlformats.org/drawingml/2006/main">
               <a:ext uri="{FF2B5EF4-FFF2-40B4-BE49-F238E27FC236}">
-                <a16:creationId xmlns:a16="http://schemas.microsoft.com/office/drawing/2014/main" id="{D569B238-2645-40CB-AF85-5AED3E6A3829}"/>
+                <a16:creationId xmlns:a16="http://schemas.microsoft.com/office/drawing/2014/main" id="{67371E96-C869-44BB-8DD9-274447F610A6}"/>
               </a:ext>
             </a:extLst>
           </p:cNvPr>
@@ -10754,7 +10762,7 @@
           <p:cNvPr id="15" name="">
             <a:extLst xmlns:a="http://schemas.openxmlformats.org/drawingml/2006/main">
               <a:ext uri="{FF2B5EF4-FFF2-40B4-BE49-F238E27FC236}">
-                <a16:creationId xmlns:a16="http://schemas.microsoft.com/office/drawing/2014/main" id="{55CC97B4-8D49-4638-9B76-6ECFB91FE14C}"/>
+                <a16:creationId xmlns:a16="http://schemas.microsoft.com/office/drawing/2014/main" id="{13429BDD-C6ED-4678-8CED-A1D3CE784E41}"/>
               </a:ext>
             </a:extLst>
           </p:cNvPr>
@@ -10809,7 +10817,7 @@
     </p:spTree>
     <p:extLst>
       <p:ext uri="{BB962C8B-B14F-4D97-AF65-F5344CB8AC3E}">
-        <p14:creationId xmlns:p14="http://schemas.microsoft.com/office/powerpoint/2010/main" val="1963573674"/>
+        <p14:creationId xmlns:p14="http://schemas.microsoft.com/office/powerpoint/2010/main" val="1644761638"/>
       </p:ext>
     </p:extLst>
   </p:cSld>
@@ -10964,7 +10972,7 @@
           <p:cNvPr id="16" name="">
             <a:extLst xmlns:a="http://schemas.openxmlformats.org/drawingml/2006/main">
               <a:ext uri="{FF2B5EF4-FFF2-40B4-BE49-F238E27FC236}">
-                <a16:creationId xmlns:a16="http://schemas.microsoft.com/office/drawing/2014/main" id="{CAF4A0DB-211F-4AB5-B272-493A4ED6239D}"/>
+                <a16:creationId xmlns:a16="http://schemas.microsoft.com/office/drawing/2014/main" id="{BC0064ED-5628-4B36-ABC4-2146147FFC8B}"/>
               </a:ext>
             </a:extLst>
           </p:cNvPr>
@@ -10996,7 +11004,7 @@
           <p:cNvPr id="2" name="">
             <a:extLst xmlns:a="http://schemas.openxmlformats.org/drawingml/2006/main">
               <a:ext uri="{FF2B5EF4-FFF2-40B4-BE49-F238E27FC236}">
-                <a16:creationId xmlns:a16="http://schemas.microsoft.com/office/drawing/2014/main" id="{28D4A875-617F-4E58-AB2D-672DACD0453D}"/>
+                <a16:creationId xmlns:a16="http://schemas.microsoft.com/office/drawing/2014/main" id="{AEF3C992-3587-4C13-886C-00662170AE6D}"/>
               </a:ext>
             </a:extLst>
           </p:cNvPr>
@@ -11053,7 +11061,7 @@
           <p:cNvPr id="3" name="">
             <a:extLst xmlns:a="http://schemas.openxmlformats.org/drawingml/2006/main">
               <a:ext uri="{FF2B5EF4-FFF2-40B4-BE49-F238E27FC236}">
-                <a16:creationId xmlns:a16="http://schemas.microsoft.com/office/drawing/2014/main" id="{8C2017F9-7296-4DE9-9C21-E596C002B110}"/>
+                <a16:creationId xmlns:a16="http://schemas.microsoft.com/office/drawing/2014/main" id="{6CD7FD12-92F0-42C4-9E25-EA93D869F573}"/>
               </a:ext>
             </a:extLst>
           </p:cNvPr>
@@ -11085,7 +11093,7 @@
           <p:cNvPr id="4" name="">
             <a:extLst xmlns:a="http://schemas.openxmlformats.org/drawingml/2006/main">
               <a:ext uri="{FF2B5EF4-FFF2-40B4-BE49-F238E27FC236}">
-                <a16:creationId xmlns:a16="http://schemas.microsoft.com/office/drawing/2014/main" id="{B035F355-A3FC-4000-A377-9ECB515B6680}"/>
+                <a16:creationId xmlns:a16="http://schemas.microsoft.com/office/drawing/2014/main" id="{924E9AB8-5383-4387-8DCB-AED6D856EEBF}"/>
               </a:ext>
             </a:extLst>
           </p:cNvPr>
@@ -11142,7 +11150,7 @@
           <p:cNvPr id="5" name="">
             <a:extLst xmlns:a="http://schemas.openxmlformats.org/drawingml/2006/main">
               <a:ext uri="{FF2B5EF4-FFF2-40B4-BE49-F238E27FC236}">
-                <a16:creationId xmlns:a16="http://schemas.microsoft.com/office/drawing/2014/main" id="{4ECDD074-7BAA-4910-9D70-890BA036E5F0}"/>
+                <a16:creationId xmlns:a16="http://schemas.microsoft.com/office/drawing/2014/main" id="{2CABCF50-84E9-450A-B6DD-624E8FF7D2E9}"/>
               </a:ext>
             </a:extLst>
           </p:cNvPr>
@@ -11199,7 +11207,7 @@
           <p:cNvPr id="6" name="">
             <a:extLst xmlns:a="http://schemas.openxmlformats.org/drawingml/2006/main">
               <a:ext uri="{FF2B5EF4-FFF2-40B4-BE49-F238E27FC236}">
-                <a16:creationId xmlns:a16="http://schemas.microsoft.com/office/drawing/2014/main" id="{AC2A81C2-2552-4435-83E3-EBC8762C73DF}"/>
+                <a16:creationId xmlns:a16="http://schemas.microsoft.com/office/drawing/2014/main" id="{CD2B9C2F-7384-4BA7-A2F7-D1483DCEF41B}"/>
               </a:ext>
             </a:extLst>
           </p:cNvPr>
@@ -11256,7 +11264,7 @@
           <p:cNvPr id="7" name="">
             <a:extLst xmlns:a="http://schemas.openxmlformats.org/drawingml/2006/main">
               <a:ext uri="{FF2B5EF4-FFF2-40B4-BE49-F238E27FC236}">
-                <a16:creationId xmlns:a16="http://schemas.microsoft.com/office/drawing/2014/main" id="{749EEFF2-F0E0-406E-86E8-DC3C90326A06}"/>
+                <a16:creationId xmlns:a16="http://schemas.microsoft.com/office/drawing/2014/main" id="{7B69087D-B52E-4196-9E7B-9D0E312630D8}"/>
               </a:ext>
             </a:extLst>
           </p:cNvPr>
@@ -11288,7 +11296,7 @@
           <p:cNvPr id="8" name="">
             <a:extLst xmlns:a="http://schemas.openxmlformats.org/drawingml/2006/main">
               <a:ext uri="{FF2B5EF4-FFF2-40B4-BE49-F238E27FC236}">
-                <a16:creationId xmlns:a16="http://schemas.microsoft.com/office/drawing/2014/main" id="{F70FEF79-95DD-4F26-9AF9-DDEF35C9E269}"/>
+                <a16:creationId xmlns:a16="http://schemas.microsoft.com/office/drawing/2014/main" id="{9F8E0DCB-9416-42F7-9618-B4D9DED49633}"/>
               </a:ext>
             </a:extLst>
           </p:cNvPr>
@@ -11345,7 +11353,7 @@
           <p:cNvPr id="9" name="">
             <a:extLst xmlns:a="http://schemas.openxmlformats.org/drawingml/2006/main">
               <a:ext uri="{FF2B5EF4-FFF2-40B4-BE49-F238E27FC236}">
-                <a16:creationId xmlns:a16="http://schemas.microsoft.com/office/drawing/2014/main" id="{1CD3B282-7E71-4C10-B7DC-C40A282F39C2}"/>
+                <a16:creationId xmlns:a16="http://schemas.microsoft.com/office/drawing/2014/main" id="{DF7E6E66-17EE-4E45-B32C-4FFC1A4D897B}"/>
               </a:ext>
             </a:extLst>
           </p:cNvPr>
@@ -11406,7 +11414,7 @@
           <p:nvPr/>
         </p:nvPicPr>
         <p:blipFill>
-          <a:blip xmlns:r="http://schemas.openxmlformats.org/officeDocument/2006/relationships" xmlns:a="http://schemas.openxmlformats.org/drawingml/2006/main" r:embed="R19703fcfb4684831"/>
+          <a:blip xmlns:r="http://schemas.openxmlformats.org/officeDocument/2006/relationships" xmlns:a="http://schemas.openxmlformats.org/drawingml/2006/main" r:embed="Re7f7d250d5044dfc"/>
           <a:stretch xmlns:a="http://schemas.openxmlformats.org/drawingml/2006/main"/>
         </p:blipFill>
         <p:spPr>
@@ -11424,7 +11432,7 @@
           <p:cNvPr id="11" name="">
             <a:extLst xmlns:a="http://schemas.openxmlformats.org/drawingml/2006/main">
               <a:ext uri="{FF2B5EF4-FFF2-40B4-BE49-F238E27FC236}">
-                <a16:creationId xmlns:a16="http://schemas.microsoft.com/office/drawing/2014/main" id="{5429F846-65A6-4AAC-98A4-3C5B324EC3F3}"/>
+                <a16:creationId xmlns:a16="http://schemas.microsoft.com/office/drawing/2014/main" id="{7FD55CCF-C8E3-46FC-A4C8-6F73E04770F4}"/>
               </a:ext>
             </a:extLst>
           </p:cNvPr>
@@ -11481,7 +11489,7 @@
           <p:cNvPr id="12" name="">
             <a:extLst xmlns:a="http://schemas.openxmlformats.org/drawingml/2006/main">
               <a:ext uri="{FF2B5EF4-FFF2-40B4-BE49-F238E27FC236}">
-                <a16:creationId xmlns:a16="http://schemas.microsoft.com/office/drawing/2014/main" id="{3D942276-9B7F-4C4F-A755-5A4F918190B6}"/>
+                <a16:creationId xmlns:a16="http://schemas.microsoft.com/office/drawing/2014/main" id="{0466B87B-5178-4E55-B870-B32BA003F31F}"/>
               </a:ext>
             </a:extLst>
           </p:cNvPr>
@@ -11538,7 +11546,7 @@
           <p:cNvPr id="13" name="">
             <a:extLst xmlns:a="http://schemas.openxmlformats.org/drawingml/2006/main">
               <a:ext uri="{FF2B5EF4-FFF2-40B4-BE49-F238E27FC236}">
-                <a16:creationId xmlns:a16="http://schemas.microsoft.com/office/drawing/2014/main" id="{3F5217D9-6970-44B0-840A-07A86E3BFCF6}"/>
+                <a16:creationId xmlns:a16="http://schemas.microsoft.com/office/drawing/2014/main" id="{C1EBB369-473C-4CB5-8FF8-3DCEA2DD12F4}"/>
               </a:ext>
             </a:extLst>
           </p:cNvPr>
@@ -11570,7 +11578,7 @@
           <p:cNvPr id="14" name="">
             <a:extLst xmlns:a="http://schemas.openxmlformats.org/drawingml/2006/main">
               <a:ext uri="{FF2B5EF4-FFF2-40B4-BE49-F238E27FC236}">
-                <a16:creationId xmlns:a16="http://schemas.microsoft.com/office/drawing/2014/main" id="{463C6F5B-8C6B-4B97-B019-B7C1DD402159}"/>
+                <a16:creationId xmlns:a16="http://schemas.microsoft.com/office/drawing/2014/main" id="{3614DBAF-062D-4ACB-9CA0-222943FAA3AE}"/>
               </a:ext>
             </a:extLst>
           </p:cNvPr>
@@ -11627,7 +11635,7 @@
           <p:cNvPr id="15" name="">
             <a:extLst xmlns:a="http://schemas.openxmlformats.org/drawingml/2006/main">
               <a:ext uri="{FF2B5EF4-FFF2-40B4-BE49-F238E27FC236}">
-                <a16:creationId xmlns:a16="http://schemas.microsoft.com/office/drawing/2014/main" id="{C973C8D5-5BFF-46B1-BF31-BD4800A707F1}"/>
+                <a16:creationId xmlns:a16="http://schemas.microsoft.com/office/drawing/2014/main" id="{47B83571-464D-49B5-8988-1AF7DA07CBA0}"/>
               </a:ext>
             </a:extLst>
           </p:cNvPr>
@@ -11682,7 +11690,7 @@
     </p:spTree>
     <p:extLst>
       <p:ext uri="{BB962C8B-B14F-4D97-AF65-F5344CB8AC3E}">
-        <p14:creationId xmlns:p14="http://schemas.microsoft.com/office/powerpoint/2010/main" val="1080799333"/>
+        <p14:creationId xmlns:p14="http://schemas.microsoft.com/office/powerpoint/2010/main" val="1772250904"/>
       </p:ext>
     </p:extLst>
   </p:cSld>
@@ -11837,7 +11845,7 @@
           <p:cNvPr id="23" name="">
             <a:extLst xmlns:a="http://schemas.openxmlformats.org/drawingml/2006/main">
               <a:ext uri="{FF2B5EF4-FFF2-40B4-BE49-F238E27FC236}">
-                <a16:creationId xmlns:a16="http://schemas.microsoft.com/office/drawing/2014/main" id="{BB8431CB-AB48-40F3-955F-3CC47F56C478}"/>
+                <a16:creationId xmlns:a16="http://schemas.microsoft.com/office/drawing/2014/main" id="{602664CF-6D81-4392-AF02-36E2D8048C22}"/>
               </a:ext>
             </a:extLst>
           </p:cNvPr>
@@ -11869,7 +11877,7 @@
           <p:cNvPr id="2" name="">
             <a:extLst xmlns:a="http://schemas.openxmlformats.org/drawingml/2006/main">
               <a:ext uri="{FF2B5EF4-FFF2-40B4-BE49-F238E27FC236}">
-                <a16:creationId xmlns:a16="http://schemas.microsoft.com/office/drawing/2014/main" id="{1AC9CD1F-E8AC-46D4-BAB1-D19ECDEE4E78}"/>
+                <a16:creationId xmlns:a16="http://schemas.microsoft.com/office/drawing/2014/main" id="{DAE35FCD-357F-44F6-A8EB-634E95F7CF6E}"/>
               </a:ext>
             </a:extLst>
           </p:cNvPr>
@@ -11926,7 +11934,7 @@
           <p:cNvPr id="3" name="">
             <a:extLst xmlns:a="http://schemas.openxmlformats.org/drawingml/2006/main">
               <a:ext uri="{FF2B5EF4-FFF2-40B4-BE49-F238E27FC236}">
-                <a16:creationId xmlns:a16="http://schemas.microsoft.com/office/drawing/2014/main" id="{576E9B63-6173-4ED3-864C-7D4C5A667FC7}"/>
+                <a16:creationId xmlns:a16="http://schemas.microsoft.com/office/drawing/2014/main" id="{88FAA97C-ED91-423E-B8A0-436F789142C1}"/>
               </a:ext>
             </a:extLst>
           </p:cNvPr>
@@ -11958,7 +11966,7 @@
           <p:cNvPr id="4" name="">
             <a:extLst xmlns:a="http://schemas.openxmlformats.org/drawingml/2006/main">
               <a:ext uri="{FF2B5EF4-FFF2-40B4-BE49-F238E27FC236}">
-                <a16:creationId xmlns:a16="http://schemas.microsoft.com/office/drawing/2014/main" id="{87CC2FFA-44B4-43F0-BDE1-5A13C023F672}"/>
+                <a16:creationId xmlns:a16="http://schemas.microsoft.com/office/drawing/2014/main" id="{B5593DFB-FDF9-48D5-A982-CCFA775BE015}"/>
               </a:ext>
             </a:extLst>
           </p:cNvPr>
@@ -12015,7 +12023,7 @@
           <p:cNvPr id="5" name="">
             <a:extLst xmlns:a="http://schemas.openxmlformats.org/drawingml/2006/main">
               <a:ext uri="{FF2B5EF4-FFF2-40B4-BE49-F238E27FC236}">
-                <a16:creationId xmlns:a16="http://schemas.microsoft.com/office/drawing/2014/main" id="{ADC305F8-D62F-4273-9AA3-985ADEE83918}"/>
+                <a16:creationId xmlns:a16="http://schemas.microsoft.com/office/drawing/2014/main" id="{3A835606-5E37-41CF-8FAC-0F4B2871102F}"/>
               </a:ext>
             </a:extLst>
           </p:cNvPr>
@@ -12072,7 +12080,7 @@
           <p:cNvPr id="6" name="">
             <a:extLst xmlns:a="http://schemas.openxmlformats.org/drawingml/2006/main">
               <a:ext uri="{FF2B5EF4-FFF2-40B4-BE49-F238E27FC236}">
-                <a16:creationId xmlns:a16="http://schemas.microsoft.com/office/drawing/2014/main" id="{681231FC-15CF-4D2E-8A93-53C262B94BC4}"/>
+                <a16:creationId xmlns:a16="http://schemas.microsoft.com/office/drawing/2014/main" id="{B7580D65-D706-44D8-AD55-8A1E49FBAB65}"/>
               </a:ext>
             </a:extLst>
           </p:cNvPr>
@@ -12129,7 +12137,7 @@
           <p:cNvPr id="7" name="">
             <a:extLst xmlns:a="http://schemas.openxmlformats.org/drawingml/2006/main">
               <a:ext uri="{FF2B5EF4-FFF2-40B4-BE49-F238E27FC236}">
-                <a16:creationId xmlns:a16="http://schemas.microsoft.com/office/drawing/2014/main" id="{9369A54F-9AA0-483D-9560-B71275C064D9}"/>
+                <a16:creationId xmlns:a16="http://schemas.microsoft.com/office/drawing/2014/main" id="{6955A33A-9C8E-485C-8DA3-FC25D0B56327}"/>
               </a:ext>
             </a:extLst>
           </p:cNvPr>
@@ -12161,7 +12169,7 @@
           <p:cNvPr id="8" name="">
             <a:extLst xmlns:a="http://schemas.openxmlformats.org/drawingml/2006/main">
               <a:ext uri="{FF2B5EF4-FFF2-40B4-BE49-F238E27FC236}">
-                <a16:creationId xmlns:a16="http://schemas.microsoft.com/office/drawing/2014/main" id="{45EEF115-6D1B-4831-BA3C-A2C316CC067C}"/>
+                <a16:creationId xmlns:a16="http://schemas.microsoft.com/office/drawing/2014/main" id="{592B5111-D5B7-4B29-94B8-2A4CD7484221}"/>
               </a:ext>
             </a:extLst>
           </p:cNvPr>
@@ -12218,7 +12226,7 @@
           <p:cNvPr id="9" name="">
             <a:extLst xmlns:a="http://schemas.openxmlformats.org/drawingml/2006/main">
               <a:ext uri="{FF2B5EF4-FFF2-40B4-BE49-F238E27FC236}">
-                <a16:creationId xmlns:a16="http://schemas.microsoft.com/office/drawing/2014/main" id="{9FBF7425-3136-4E8A-81D9-27D2AC5FBA23}"/>
+                <a16:creationId xmlns:a16="http://schemas.microsoft.com/office/drawing/2014/main" id="{8D22B077-8E8F-4EB5-B883-5203D46C8FB4}"/>
               </a:ext>
             </a:extLst>
           </p:cNvPr>
@@ -12275,7 +12283,7 @@
           <p:cNvPr id="10" name="">
             <a:extLst xmlns:a="http://schemas.openxmlformats.org/drawingml/2006/main">
               <a:ext uri="{FF2B5EF4-FFF2-40B4-BE49-F238E27FC236}">
-                <a16:creationId xmlns:a16="http://schemas.microsoft.com/office/drawing/2014/main" id="{37E4756B-2036-4DB6-840A-C55FA05C3AA4}"/>
+                <a16:creationId xmlns:a16="http://schemas.microsoft.com/office/drawing/2014/main" id="{C675B3C3-8E14-401B-8873-0B23F72E3530}"/>
               </a:ext>
             </a:extLst>
           </p:cNvPr>
@@ -12309,7 +12317,7 @@
           <p:cNvPr id="11" name="">
             <a:extLst xmlns:a="http://schemas.openxmlformats.org/drawingml/2006/main">
               <a:ext uri="{FF2B5EF4-FFF2-40B4-BE49-F238E27FC236}">
-                <a16:creationId xmlns:a16="http://schemas.microsoft.com/office/drawing/2014/main" id="{8AF61137-B8CB-4484-9D73-7221579A1EB3}"/>
+                <a16:creationId xmlns:a16="http://schemas.microsoft.com/office/drawing/2014/main" id="{6D60CEB3-EB7D-4CD4-BFEA-88D6EFBE9EE9}"/>
               </a:ext>
             </a:extLst>
           </p:cNvPr>
@@ -12341,7 +12349,7 @@
           <p:cNvPr id="12" name="">
             <a:extLst xmlns:a="http://schemas.openxmlformats.org/drawingml/2006/main">
               <a:ext uri="{FF2B5EF4-FFF2-40B4-BE49-F238E27FC236}">
-                <a16:creationId xmlns:a16="http://schemas.microsoft.com/office/drawing/2014/main" id="{4BD60072-2295-4C75-83F2-4EB600418217}"/>
+                <a16:creationId xmlns:a16="http://schemas.microsoft.com/office/drawing/2014/main" id="{53430BAF-8ABD-4482-90DF-E6C4C6B7AC09}"/>
               </a:ext>
             </a:extLst>
           </p:cNvPr>
@@ -12398,7 +12406,7 @@
           <p:cNvPr id="13" name="">
             <a:extLst xmlns:a="http://schemas.openxmlformats.org/drawingml/2006/main">
               <a:ext uri="{FF2B5EF4-FFF2-40B4-BE49-F238E27FC236}">
-                <a16:creationId xmlns:a16="http://schemas.microsoft.com/office/drawing/2014/main" id="{0288C8BE-AF3C-47CE-9FD4-9096037E585B}"/>
+                <a16:creationId xmlns:a16="http://schemas.microsoft.com/office/drawing/2014/main" id="{543CC599-A597-4280-A6C7-88072DF37A9F}"/>
               </a:ext>
             </a:extLst>
           </p:cNvPr>
@@ -12455,7 +12463,7 @@
           <p:cNvPr id="14" name="">
             <a:extLst xmlns:a="http://schemas.openxmlformats.org/drawingml/2006/main">
               <a:ext uri="{FF2B5EF4-FFF2-40B4-BE49-F238E27FC236}">
-                <a16:creationId xmlns:a16="http://schemas.microsoft.com/office/drawing/2014/main" id="{16AFF94E-9E9D-4DFC-87BD-7620DDE47BB0}"/>
+                <a16:creationId xmlns:a16="http://schemas.microsoft.com/office/drawing/2014/main" id="{EF164982-2A87-4D9D-A5AD-4316D1576631}"/>
               </a:ext>
             </a:extLst>
           </p:cNvPr>
@@ -12489,7 +12497,7 @@
           <p:cNvPr id="15" name="">
             <a:extLst xmlns:a="http://schemas.openxmlformats.org/drawingml/2006/main">
               <a:ext uri="{FF2B5EF4-FFF2-40B4-BE49-F238E27FC236}">
-                <a16:creationId xmlns:a16="http://schemas.microsoft.com/office/drawing/2014/main" id="{0B694795-8276-46B1-B577-C217AFB9D0C9}"/>
+                <a16:creationId xmlns:a16="http://schemas.microsoft.com/office/drawing/2014/main" id="{2B4C57BF-5575-4DFE-BF92-261323D8426A}"/>
               </a:ext>
             </a:extLst>
           </p:cNvPr>
@@ -12521,7 +12529,7 @@
           <p:cNvPr id="16" name="">
             <a:extLst xmlns:a="http://schemas.openxmlformats.org/drawingml/2006/main">
               <a:ext uri="{FF2B5EF4-FFF2-40B4-BE49-F238E27FC236}">
-                <a16:creationId xmlns:a16="http://schemas.microsoft.com/office/drawing/2014/main" id="{DBCA996C-B031-4FD6-B27C-C1FA2F4B4260}"/>
+                <a16:creationId xmlns:a16="http://schemas.microsoft.com/office/drawing/2014/main" id="{30F035B1-0A20-4F10-91D3-1547FDC46A2C}"/>
               </a:ext>
             </a:extLst>
           </p:cNvPr>
@@ -12578,7 +12586,7 @@
           <p:cNvPr id="17" name="">
             <a:extLst xmlns:a="http://schemas.openxmlformats.org/drawingml/2006/main">
               <a:ext uri="{FF2B5EF4-FFF2-40B4-BE49-F238E27FC236}">
-                <a16:creationId xmlns:a16="http://schemas.microsoft.com/office/drawing/2014/main" id="{9995ED86-5C9A-4F3B-9EEF-CDA223154AFB}"/>
+                <a16:creationId xmlns:a16="http://schemas.microsoft.com/office/drawing/2014/main" id="{310455C9-D8E0-4235-BC07-981CAD2F0339}"/>
               </a:ext>
             </a:extLst>
           </p:cNvPr>
@@ -12635,7 +12643,7 @@
           <p:cNvPr id="18" name="">
             <a:extLst xmlns:a="http://schemas.openxmlformats.org/drawingml/2006/main">
               <a:ext uri="{FF2B5EF4-FFF2-40B4-BE49-F238E27FC236}">
-                <a16:creationId xmlns:a16="http://schemas.microsoft.com/office/drawing/2014/main" id="{EF6348C5-CE38-4D3C-AD0B-E0E91AD86619}"/>
+                <a16:creationId xmlns:a16="http://schemas.microsoft.com/office/drawing/2014/main" id="{6F5E11A4-DCC6-4D8E-B58B-065B76657E71}"/>
               </a:ext>
             </a:extLst>
           </p:cNvPr>
@@ -12669,7 +12677,7 @@
           <p:cNvPr id="19" name="">
             <a:extLst xmlns:a="http://schemas.openxmlformats.org/drawingml/2006/main">
               <a:ext uri="{FF2B5EF4-FFF2-40B4-BE49-F238E27FC236}">
-                <a16:creationId xmlns:a16="http://schemas.microsoft.com/office/drawing/2014/main" id="{31C47A71-D757-4F8F-B07C-CA68A2456703}"/>
+                <a16:creationId xmlns:a16="http://schemas.microsoft.com/office/drawing/2014/main" id="{F070981B-5B62-4F5F-AA87-75E9C28AD546}"/>
               </a:ext>
             </a:extLst>
           </p:cNvPr>
@@ -12701,7 +12709,7 @@
           <p:cNvPr id="20" name="">
             <a:extLst xmlns:a="http://schemas.openxmlformats.org/drawingml/2006/main">
               <a:ext uri="{FF2B5EF4-FFF2-40B4-BE49-F238E27FC236}">
-                <a16:creationId xmlns:a16="http://schemas.microsoft.com/office/drawing/2014/main" id="{B4A675BD-47B4-4A67-A735-A9CE8B2DF434}"/>
+                <a16:creationId xmlns:a16="http://schemas.microsoft.com/office/drawing/2014/main" id="{6EDD5D58-F382-4EA8-AA98-FA4406DCB511}"/>
               </a:ext>
             </a:extLst>
           </p:cNvPr>
@@ -12758,7 +12766,7 @@
           <p:cNvPr id="21" name="">
             <a:extLst xmlns:a="http://schemas.openxmlformats.org/drawingml/2006/main">
               <a:ext uri="{FF2B5EF4-FFF2-40B4-BE49-F238E27FC236}">
-                <a16:creationId xmlns:a16="http://schemas.microsoft.com/office/drawing/2014/main" id="{4B163909-BF30-486E-9319-2F50B9D4AAA6}"/>
+                <a16:creationId xmlns:a16="http://schemas.microsoft.com/office/drawing/2014/main" id="{697C1BB6-19F1-422F-BDC2-F5B7872E5E31}"/>
               </a:ext>
             </a:extLst>
           </p:cNvPr>
@@ -12815,7 +12823,7 @@
           <p:cNvPr id="22" name="">
             <a:extLst xmlns:a="http://schemas.openxmlformats.org/drawingml/2006/main">
               <a:ext uri="{FF2B5EF4-FFF2-40B4-BE49-F238E27FC236}">
-                <a16:creationId xmlns:a16="http://schemas.microsoft.com/office/drawing/2014/main" id="{8DB2792E-405E-43A8-86B7-877B9B029734}"/>
+                <a16:creationId xmlns:a16="http://schemas.microsoft.com/office/drawing/2014/main" id="{976EBC48-A67F-4488-90C4-8DD9F204B8E4}"/>
               </a:ext>
             </a:extLst>
           </p:cNvPr>
@@ -12870,7 +12878,7 @@
     </p:spTree>
     <p:extLst>
       <p:ext uri="{BB962C8B-B14F-4D97-AF65-F5344CB8AC3E}">
-        <p14:creationId xmlns:p14="http://schemas.microsoft.com/office/powerpoint/2010/main" val="675388473"/>
+        <p14:creationId xmlns:p14="http://schemas.microsoft.com/office/powerpoint/2010/main" val="1298897804"/>
       </p:ext>
     </p:extLst>
   </p:cSld>
@@ -13071,7 +13079,7 @@
           <p:cNvPr id="22" name="">
             <a:extLst xmlns:a="http://schemas.openxmlformats.org/drawingml/2006/main">
               <a:ext uri="{FF2B5EF4-FFF2-40B4-BE49-F238E27FC236}">
-                <a16:creationId xmlns:a16="http://schemas.microsoft.com/office/drawing/2014/main" id="{171BDF44-6237-4AD7-BB1C-C5DFE07E81F7}"/>
+                <a16:creationId xmlns:a16="http://schemas.microsoft.com/office/drawing/2014/main" id="{51602D29-6122-4FD5-A77D-DB3A26DA49C6}"/>
               </a:ext>
             </a:extLst>
           </p:cNvPr>
@@ -13103,7 +13111,7 @@
           <p:cNvPr id="2" name="">
             <a:extLst xmlns:a="http://schemas.openxmlformats.org/drawingml/2006/main">
               <a:ext uri="{FF2B5EF4-FFF2-40B4-BE49-F238E27FC236}">
-                <a16:creationId xmlns:a16="http://schemas.microsoft.com/office/drawing/2014/main" id="{59782520-25E2-4AE6-83CA-28BBF822C4D6}"/>
+                <a16:creationId xmlns:a16="http://schemas.microsoft.com/office/drawing/2014/main" id="{93AAF34D-922A-4EA4-9944-77D998076E03}"/>
               </a:ext>
             </a:extLst>
           </p:cNvPr>
@@ -13160,7 +13168,7 @@
           <p:cNvPr id="3" name="">
             <a:extLst xmlns:a="http://schemas.openxmlformats.org/drawingml/2006/main">
               <a:ext uri="{FF2B5EF4-FFF2-40B4-BE49-F238E27FC236}">
-                <a16:creationId xmlns:a16="http://schemas.microsoft.com/office/drawing/2014/main" id="{175B8817-BD17-43E6-834F-F76DFCCA5B17}"/>
+                <a16:creationId xmlns:a16="http://schemas.microsoft.com/office/drawing/2014/main" id="{F2B9243E-8C8C-4E8D-8BB9-E9C766535191}"/>
               </a:ext>
             </a:extLst>
           </p:cNvPr>
@@ -13192,7 +13200,7 @@
           <p:cNvPr id="4" name="">
             <a:extLst xmlns:a="http://schemas.openxmlformats.org/drawingml/2006/main">
               <a:ext uri="{FF2B5EF4-FFF2-40B4-BE49-F238E27FC236}">
-                <a16:creationId xmlns:a16="http://schemas.microsoft.com/office/drawing/2014/main" id="{628586AF-592D-4C9F-8929-68DE0B56CF96}"/>
+                <a16:creationId xmlns:a16="http://schemas.microsoft.com/office/drawing/2014/main" id="{7D2E6140-6C0D-4D90-8D40-30253DC4DDB4}"/>
               </a:ext>
             </a:extLst>
           </p:cNvPr>
@@ -13249,7 +13257,7 @@
           <p:cNvPr id="5" name="">
             <a:extLst xmlns:a="http://schemas.openxmlformats.org/drawingml/2006/main">
               <a:ext uri="{FF2B5EF4-FFF2-40B4-BE49-F238E27FC236}">
-                <a16:creationId xmlns:a16="http://schemas.microsoft.com/office/drawing/2014/main" id="{AE240F73-267E-4AE9-89E3-A0C4780046B8}"/>
+                <a16:creationId xmlns:a16="http://schemas.microsoft.com/office/drawing/2014/main" id="{BDE6BB9B-8D0C-4C9A-8CD7-FC2E533C8E2D}"/>
               </a:ext>
             </a:extLst>
           </p:cNvPr>
@@ -13306,7 +13314,7 @@
           <p:cNvPr id="6" name="">
             <a:extLst xmlns:a="http://schemas.openxmlformats.org/drawingml/2006/main">
               <a:ext uri="{FF2B5EF4-FFF2-40B4-BE49-F238E27FC236}">
-                <a16:creationId xmlns:a16="http://schemas.microsoft.com/office/drawing/2014/main" id="{AA8A4E7A-5D08-4C50-B045-12011C922EC1}"/>
+                <a16:creationId xmlns:a16="http://schemas.microsoft.com/office/drawing/2014/main" id="{C755F1DC-73F4-48A7-A848-1044D91CA3C0}"/>
               </a:ext>
             </a:extLst>
           </p:cNvPr>
@@ -13363,7 +13371,7 @@
           <p:cNvPr id="7" name="">
             <a:extLst xmlns:a="http://schemas.openxmlformats.org/drawingml/2006/main">
               <a:ext uri="{FF2B5EF4-FFF2-40B4-BE49-F238E27FC236}">
-                <a16:creationId xmlns:a16="http://schemas.microsoft.com/office/drawing/2014/main" id="{1CDBFEDF-493E-42B7-811F-4456786EE15C}"/>
+                <a16:creationId xmlns:a16="http://schemas.microsoft.com/office/drawing/2014/main" id="{4D992ACB-2A8E-485F-B803-54010F047041}"/>
               </a:ext>
             </a:extLst>
           </p:cNvPr>
@@ -13395,7 +13403,7 @@
           <p:cNvPr id="8" name="">
             <a:extLst xmlns:a="http://schemas.openxmlformats.org/drawingml/2006/main">
               <a:ext uri="{FF2B5EF4-FFF2-40B4-BE49-F238E27FC236}">
-                <a16:creationId xmlns:a16="http://schemas.microsoft.com/office/drawing/2014/main" id="{E416ED4F-DEF1-483A-99E5-FD8A08876D5E}"/>
+                <a16:creationId xmlns:a16="http://schemas.microsoft.com/office/drawing/2014/main" id="{348000C4-E243-47E4-9A3E-C3BD6808110B}"/>
               </a:ext>
             </a:extLst>
           </p:cNvPr>
@@ -13452,7 +13460,7 @@
           <p:cNvPr id="9" name="">
             <a:extLst xmlns:a="http://schemas.openxmlformats.org/drawingml/2006/main">
               <a:ext uri="{FF2B5EF4-FFF2-40B4-BE49-F238E27FC236}">
-                <a16:creationId xmlns:a16="http://schemas.microsoft.com/office/drawing/2014/main" id="{5F189B97-2AF6-43AE-AD21-A053DCE90BF5}"/>
+                <a16:creationId xmlns:a16="http://schemas.microsoft.com/office/drawing/2014/main" id="{873F0496-9FD4-45D0-A702-F5039B220040}"/>
               </a:ext>
             </a:extLst>
           </p:cNvPr>
@@ -13509,7 +13517,7 @@
           <p:cNvPr id="10" name="">
             <a:extLst xmlns:a="http://schemas.openxmlformats.org/drawingml/2006/main">
               <a:ext uri="{FF2B5EF4-FFF2-40B4-BE49-F238E27FC236}">
-                <a16:creationId xmlns:a16="http://schemas.microsoft.com/office/drawing/2014/main" id="{E140F3DE-FAD7-4E38-BA70-54F62425E229}"/>
+                <a16:creationId xmlns:a16="http://schemas.microsoft.com/office/drawing/2014/main" id="{4EFE56A2-D339-4900-88FE-80DD1BC8B5B6}"/>
               </a:ext>
             </a:extLst>
           </p:cNvPr>
@@ -13543,7 +13551,7 @@
           <p:cNvPr id="11" name="">
             <a:extLst xmlns:a="http://schemas.openxmlformats.org/drawingml/2006/main">
               <a:ext uri="{FF2B5EF4-FFF2-40B4-BE49-F238E27FC236}">
-                <a16:creationId xmlns:a16="http://schemas.microsoft.com/office/drawing/2014/main" id="{6075EA24-9334-48F7-A881-B49D09B04144}"/>
+                <a16:creationId xmlns:a16="http://schemas.microsoft.com/office/drawing/2014/main" id="{3E7D191C-B82C-499E-90CD-1FC6F72F0991}"/>
               </a:ext>
             </a:extLst>
           </p:cNvPr>
@@ -13575,7 +13583,7 @@
           <p:cNvPr id="12" name="">
             <a:extLst xmlns:a="http://schemas.openxmlformats.org/drawingml/2006/main">
               <a:ext uri="{FF2B5EF4-FFF2-40B4-BE49-F238E27FC236}">
-                <a16:creationId xmlns:a16="http://schemas.microsoft.com/office/drawing/2014/main" id="{749982B2-040C-46DB-A519-1B16C4794FE8}"/>
+                <a16:creationId xmlns:a16="http://schemas.microsoft.com/office/drawing/2014/main" id="{81E70469-57A4-4846-8155-B496C236D741}"/>
               </a:ext>
             </a:extLst>
           </p:cNvPr>
@@ -13632,7 +13640,7 @@
           <p:cNvPr id="13" name="">
             <a:extLst xmlns:a="http://schemas.openxmlformats.org/drawingml/2006/main">
               <a:ext uri="{FF2B5EF4-FFF2-40B4-BE49-F238E27FC236}">
-                <a16:creationId xmlns:a16="http://schemas.microsoft.com/office/drawing/2014/main" id="{09D2F848-E45B-494E-A6A8-DE463E04599E}"/>
+                <a16:creationId xmlns:a16="http://schemas.microsoft.com/office/drawing/2014/main" id="{EA8C1062-41A5-46A2-A420-AF9944AE4FF1}"/>
               </a:ext>
             </a:extLst>
           </p:cNvPr>
@@ -13689,7 +13697,7 @@
           <p:cNvPr id="14" name="">
             <a:extLst xmlns:a="http://schemas.openxmlformats.org/drawingml/2006/main">
               <a:ext uri="{FF2B5EF4-FFF2-40B4-BE49-F238E27FC236}">
-                <a16:creationId xmlns:a16="http://schemas.microsoft.com/office/drawing/2014/main" id="{1FB233EB-BCBE-4E2D-8476-220ACB25D747}"/>
+                <a16:creationId xmlns:a16="http://schemas.microsoft.com/office/drawing/2014/main" id="{AB51136B-376C-4232-8699-C1F9DA402899}"/>
               </a:ext>
             </a:extLst>
           </p:cNvPr>
@@ -13723,7 +13731,7 @@
           <p:cNvPr id="15" name="">
             <a:extLst xmlns:a="http://schemas.openxmlformats.org/drawingml/2006/main">
               <a:ext uri="{FF2B5EF4-FFF2-40B4-BE49-F238E27FC236}">
-                <a16:creationId xmlns:a16="http://schemas.microsoft.com/office/drawing/2014/main" id="{3561C994-A84C-48E4-A48B-81EFD8123D4D}"/>
+                <a16:creationId xmlns:a16="http://schemas.microsoft.com/office/drawing/2014/main" id="{2C1E1AE7-6BC8-4367-8BB3-E8E9BBBFE3C2}"/>
               </a:ext>
             </a:extLst>
           </p:cNvPr>
@@ -13755,7 +13763,7 @@
           <p:cNvPr id="16" name="">
             <a:extLst xmlns:a="http://schemas.openxmlformats.org/drawingml/2006/main">
               <a:ext uri="{FF2B5EF4-FFF2-40B4-BE49-F238E27FC236}">
-                <a16:creationId xmlns:a16="http://schemas.microsoft.com/office/drawing/2014/main" id="{4F411D0E-B025-49FB-BA76-2B9004894F1F}"/>
+                <a16:creationId xmlns:a16="http://schemas.microsoft.com/office/drawing/2014/main" id="{70989A48-2076-4C99-BE67-341A52E025B8}"/>
               </a:ext>
             </a:extLst>
           </p:cNvPr>
@@ -13812,7 +13820,7 @@
           <p:cNvPr id="17" name="">
             <a:extLst xmlns:a="http://schemas.openxmlformats.org/drawingml/2006/main">
               <a:ext uri="{FF2B5EF4-FFF2-40B4-BE49-F238E27FC236}">
-                <a16:creationId xmlns:a16="http://schemas.microsoft.com/office/drawing/2014/main" id="{183A79BF-C045-452D-9FC7-B5B22F159004}"/>
+                <a16:creationId xmlns:a16="http://schemas.microsoft.com/office/drawing/2014/main" id="{4960EBDB-5662-48C7-828C-B1743E705B64}"/>
               </a:ext>
             </a:extLst>
           </p:cNvPr>
@@ -13869,7 +13877,7 @@
           <p:cNvPr id="18" name="">
             <a:extLst xmlns:a="http://schemas.openxmlformats.org/drawingml/2006/main">
               <a:ext uri="{FF2B5EF4-FFF2-40B4-BE49-F238E27FC236}">
-                <a16:creationId xmlns:a16="http://schemas.microsoft.com/office/drawing/2014/main" id="{B832BBF3-B6E0-46DD-9866-260C5C7D7625}"/>
+                <a16:creationId xmlns:a16="http://schemas.microsoft.com/office/drawing/2014/main" id="{988E2C16-7309-4AB6-99FB-2F7F4F2C1382}"/>
               </a:ext>
             </a:extLst>
           </p:cNvPr>
@@ -13903,7 +13911,7 @@
           <p:cNvPr id="19" name="">
             <a:extLst xmlns:a="http://schemas.openxmlformats.org/drawingml/2006/main">
               <a:ext uri="{FF2B5EF4-FFF2-40B4-BE49-F238E27FC236}">
-                <a16:creationId xmlns:a16="http://schemas.microsoft.com/office/drawing/2014/main" id="{94F3176C-7FAC-48D7-A642-D20C9B460D4D}"/>
+                <a16:creationId xmlns:a16="http://schemas.microsoft.com/office/drawing/2014/main" id="{B351A16E-E4A7-4CBD-A86D-DFF68E17D20D}"/>
               </a:ext>
             </a:extLst>
           </p:cNvPr>
@@ -13935,7 +13943,7 @@
           <p:cNvPr id="20" name="">
             <a:extLst xmlns:a="http://schemas.openxmlformats.org/drawingml/2006/main">
               <a:ext uri="{FF2B5EF4-FFF2-40B4-BE49-F238E27FC236}">
-                <a16:creationId xmlns:a16="http://schemas.microsoft.com/office/drawing/2014/main" id="{6F4BF729-FE3D-466A-B280-7302F86548B2}"/>
+                <a16:creationId xmlns:a16="http://schemas.microsoft.com/office/drawing/2014/main" id="{ED18A4CB-ED85-4909-AE69-8AED4ABDE8E8}"/>
               </a:ext>
             </a:extLst>
           </p:cNvPr>
@@ -13992,7 +14000,7 @@
           <p:cNvPr id="21" name="">
             <a:extLst xmlns:a="http://schemas.openxmlformats.org/drawingml/2006/main">
               <a:ext uri="{FF2B5EF4-FFF2-40B4-BE49-F238E27FC236}">
-                <a16:creationId xmlns:a16="http://schemas.microsoft.com/office/drawing/2014/main" id="{B97362EC-C238-4ABA-A1A4-B0C4A3A5CF97}"/>
+                <a16:creationId xmlns:a16="http://schemas.microsoft.com/office/drawing/2014/main" id="{F55EC99D-5B6C-4F62-AC6D-20EB8AE9E496}"/>
               </a:ext>
             </a:extLst>
           </p:cNvPr>
@@ -14047,7 +14055,7 @@
     </p:spTree>
     <p:extLst>
       <p:ext uri="{BB962C8B-B14F-4D97-AF65-F5344CB8AC3E}">
-        <p14:creationId xmlns:p14="http://schemas.microsoft.com/office/powerpoint/2010/main" val="2089653544"/>
+        <p14:creationId xmlns:p14="http://schemas.microsoft.com/office/powerpoint/2010/main" val="1497918202"/>
       </p:ext>
     </p:extLst>
   </p:cSld>
